--- a/D7016B_Demo2_Viktor_Lindberg.pptx
+++ b/D7016B_Demo2_Viktor_Lindberg.pptx
@@ -10,9 +10,11 @@
   <p:sldIdLst>
     <p:sldId id="270" r:id="rId16"/>
     <p:sldId id="272" r:id="rId19"/>
+    <p:sldId id="279" r:id="rId13"/>
     <p:sldId id="273" r:id="rId20"/>
     <p:sldId id="274" r:id="rId21"/>
     <p:sldId id="277" r:id="rId24"/>
+    <p:sldId id="280" r:id="rId14"/>
     <p:sldId id="278" r:id="rId25"/>
   </p:sldIdLst>
   <p:sldSz cx="9144000" cy="5143500" type="screen16x9"/>
@@ -275,7 +277,7 @@
           <a:lstStyle/>
           <a:p>
             <a:r>
-              <a:t>Demonstration 2. The project changed direction since demonstration 1; the first slide explains why and what data there is.</a:t>
+              <a:t>Demonstration 2. Since demonstration 1 the project has changed direction. I will show why, the idea, the method, how it is tested with one scan, how it would be used over time, and where the report stands. No results today; they come in the report.</a:t>
             </a:r>
           </a:p>
         </p:txBody>
@@ -321,7 +323,7 @@
           <a:lstStyle/>
           <a:p>
             <a:r>
-              <a:t>The first idea was to link the vibration events from part one to the track geometry and predict fault types from vibration. The vibration data that links events to positions was not available. What I do have is one LiDAR scan: 15.9 million points over about 260 metres of double track, with no timestamps, no coordinate system and no second run. The height in the file is relative to the sensor, which rides on the rails, so of the five TQI parameters only gauge can be followed, plus the sideways alignment. So the project became: build a method that turns a run into a comparable 3D curve, and test what it could detect.</a:t>
+              <a:t>The first idea was to link the vibration events from part one to the track geometry and predict fault types. The vibration data that links events to positions was not available, so that could not be tested. What I have is one LiDAR scan of a stretch of double track. There is no second scan, so two runs cannot be compared yet. And the height in the file is measured from the sensor, which rides on the rails, so slow height changes cancel out: gauge and sideways alignment can be followed in full, height only for short dips and humps. So the project became: build a method that turns a scan into a comparable 3D curve, and test it.</a:t>
             </a:r>
           </a:p>
         </p:txBody>
@@ -367,7 +369,7 @@
           <a:lstStyle/>
           <a:p>
             <a:r>
-              <a:t>Every run is projected onto one fixed reference line, so position along the track means the same thing in every run. The rails are found in 25 cm slices, averaged into control points every metre, and joined by a Catmull-Rom spline. The spline passes through every control point and each piece depends only on its four nearest points, so a change in one place moves the curve only there. Nothing is random and all settings are stored, so a rebuild gives an identical result.</a:t>
+              <a:t>The method in five steps. A reference line is built once along the track, and every run is projected onto it, so that a position means the same thing in every run. In every short slab along the line the top of each rail and its inner face are found in the points. The slabs are averaged into control points at regular steps. A Catmull-Rom curve goes through every control point, and each piece of it depends only on its nearest points, so a change in one place moves the curve only there. From that curve the gauge, the alignment and the index per section are read off. Nothing is random: the same scan always gives the same curve.</a:t>
             </a:r>
           </a:p>
         </p:txBody>
@@ -413,7 +415,7 @@
           <a:lstStyle/>
           <a:p>
             <a:r>
-              <a:t>With one scan I cannot compare two real runs. Instead the scan is split into two halves that are processed separately. Their difference is the noise floor of the method: 0.9 mm for gauge. Then a known 4 mm gauge widening is added to one half, and the comparison recovers 3.9 mm along the whole stretch. The method also found something real: a gauge step of 3 to 4 mm at 155 m with a small dip in each rail, which looks like a rail joint - not confirmed.</a:t>
+              <a:t>The method compares two scans of the same track, and I have one. So I make two out of it: the points are dealt out in turns, a handful to scan 1, the next to scan 2. Each set covers the whole track, and no point is in both, like two scans taken at the same moment. Then three checks. Repeat: the same points through the method twice must give exactly the same curve. Noise: scan 1 against scan 2, where nothing has changed, so whatever differs is the method's own noise. Faults: known faults are planted in scan 2, a widening, a dipped joint, a twist and a cross-level step, and the method must find them at their size. Cant cannot be tested, because it needs an absolute height. The same test is also run with the control points closer together or further apart. The results come in the report.</a:t>
             </a:r>
           </a:p>
         </p:txBody>
@@ -459,7 +461,7 @@
           <a:lstStyle/>
           <a:p>
             <a:r>
-              <a:t>Since there is only one real run, I simulated a monitoring period: 13 scans, one every two weeks, each made from a random half of the real scan with assumed defects added. Each run goes through the unchanged method. When an indicator passes its alert limit we get a warning; at the alarm limit maintenance is ordered at that place and the defect is reset. Nothing is scripted to happen in a given week. The slow gauge widening and the alignment defect are found by the curve and not by the TQI; the short-wave irregularity is found by the TQI and not by the curve. This shows the behaviour of the method, not of the real track.</a:t>
+              <a:t>To show how the curve would be used, I simulated a monitoring period: a run every few weeks, each made from the real scan with assumed defects that grow a little each time. Every run goes through the same method and is compared with the first. A control chart watches every place along the curve: an alert when a place steps out of its normal scatter, which happens early, while the change is small. When the change reaches an assumed limit, an alarm orders maintenance there, the defect is reset, and it starts growing again. Nothing is scripted to happen in a certain week. This shows the behaviour of the method, not of the real track.</a:t>
             </a:r>
           </a:p>
         </p:txBody>
@@ -505,7 +507,99 @@
           <a:lstStyle/>
           <a:p>
             <a:r>
-              <a:t>What is shown is the measurement: a repeatable curve, a noise floor of about a millimetre, and in simulation the whole chain from detection to maintenance. What is not shown is change between real runs, because there is one run, and anything that needs height. The next steps are a second run of the same line, data where the height is levelled, and a comparison with the track-recording car.</a:t>
+              <a:t>Where the report stands: the introduction is written, with the background, the idea and the research questions. The method section is written: the pipeline, the test plan and the simulation. Next come the results, the test on the real scan and the simulation, and then the discussion of what the method can and cannot show.</a:t>
+            </a:r>
+          </a:p>
+        </p:txBody>
+      </p:sp>
+    </p:spTree>
+  </p:cSld>
+  <p:clrMapOvr>
+    <a:masterClrMapping/>
+  </p:clrMapOvr>
+</p:notes>
+</file>
+
+<file path=ppt/notesSlides/notesSlide7.xml><?xml version="1.0" encoding="utf-8"?>
+<p:notes xmlns:a="http://schemas.openxmlformats.org/drawingml/2006/main" xmlns:p="http://schemas.openxmlformats.org/presentationml/2006/main" xmlns:r="http://schemas.openxmlformats.org/officeDocument/2006/relationships">
+  <p:cSld>
+    <p:spTree>
+      <p:nvGrpSpPr>
+        <p:cNvPr id="1" name=""/>
+        <p:cNvGrpSpPr/>
+        <p:nvPr/>
+      </p:nvGrpSpPr>
+      <p:grpSpPr>
+        <a:xfrm>
+          <a:off x="0" y="0"/>
+          <a:ext cx="0" cy="0"/>
+          <a:chOff x="0" y="0"/>
+          <a:chExt cx="0" cy="0"/>
+        </a:xfrm>
+      </p:grpSpPr>
+      <p:sp>
+        <p:nvSpPr>
+          <p:cNvPr id="3" name="Notes Placeholder 2"/>
+          <p:cNvSpPr>
+            <a:spLocks noGrp="1"/>
+          </p:cNvSpPr>
+          <p:nvPr>
+            <p:ph type="body" idx="1"/>
+          </p:nvPr>
+        </p:nvSpPr>
+        <p:spPr/>
+        <p:txBody>
+          <a:bodyPr/>
+          <a:lstStyle/>
+          <a:p>
+            <a:r>
+              <a:t>Track geometry is usually followed with an index, one number per section, that says how rough the section is. That is useful, but where the change is and how big it is get averaged away, and a single bad spot can hide in a good average. The idea here is to represent both rails as a curve in a fixed frame. Then two runs can be compared point by point, in millimetres, and the index can still be computed from the curve afterwards. With this data, gauge and sideways alignment are measured in full; height only for short dips and humps, because the scanner rides on the rails.</a:t>
+            </a:r>
+          </a:p>
+        </p:txBody>
+      </p:sp>
+    </p:spTree>
+  </p:cSld>
+  <p:clrMapOvr>
+    <a:masterClrMapping/>
+  </p:clrMapOvr>
+</p:notes>
+</file>
+
+<file path=ppt/notesSlides/notesSlide8.xml><?xml version="1.0" encoding="utf-8"?>
+<p:notes xmlns:a="http://schemas.openxmlformats.org/drawingml/2006/main" xmlns:p="http://schemas.openxmlformats.org/presentationml/2006/main" xmlns:r="http://schemas.openxmlformats.org/officeDocument/2006/relationships">
+  <p:cSld>
+    <p:spTree>
+      <p:nvGrpSpPr>
+        <p:cNvPr id="1" name=""/>
+        <p:cNvGrpSpPr/>
+        <p:nvPr/>
+      </p:nvGrpSpPr>
+      <p:grpSpPr>
+        <a:xfrm>
+          <a:off x="0" y="0"/>
+          <a:ext cx="0" cy="0"/>
+          <a:chOff x="0" y="0"/>
+          <a:chExt cx="0" cy="0"/>
+        </a:xfrm>
+      </p:grpSpPr>
+      <p:sp>
+        <p:nvSpPr>
+          <p:cNvPr id="3" name="Notes Placeholder 2"/>
+          <p:cNvSpPr>
+            <a:spLocks noGrp="1"/>
+          </p:cNvSpPr>
+          <p:nvPr>
+            <p:ph type="body" idx="1"/>
+          </p:nvPr>
+        </p:nvSpPr>
+        <p:spPr/>
+        <p:txBody>
+          <a:bodyPr/>
+          <a:lstStyle/>
+          <a:p>
+            <a:r>
+              <a:t>Three research questions. One: when the scan is split into two halves and a curve is built from each, how much do the two curves differ, for gauge, alignment and height. Two: which track faults can be detected using the curve, and how the distance between the control points affects what can be detected. Three: how would the curve be used over time to raise alerts and alarms, shown by the simulation. The study is exploratory: with one scan the answers describe the method, not the track.</a:t>
             </a:r>
           </a:p>
         </p:txBody>
@@ -830,7 +924,7 @@
 </p:sldMaster>
 </file>
 
-<file path=ppt/slides/slide15.xml><?xml version="1.0" encoding="utf-8"?>
+<file path=ppt/slides/slide1.xml><?xml version="1.0" encoding="utf-8"?>
 <p:sld xmlns:a="http://schemas.openxmlformats.org/drawingml/2006/main" xmlns:r="http://schemas.openxmlformats.org/officeDocument/2006/relationships" xmlns:p="http://schemas.openxmlformats.org/presentationml/2006/main">
   <p:cSld>
     <p:bg>
@@ -1034,7 +1128,7 @@
                 <a:ea typeface="Calibri" pitchFamily="34" charset="-122"/>
                 <a:cs typeface="Calibri" pitchFamily="34" charset="-120"/>
               </a:rPr>
-              <a:t>…a method built and tested on one LiDAR scan</a:t>
+              <a:t>…one LiDAR scan, a curve of both rails, and how it would be used over time</a:t>
             </a:r>
             <a:endParaRPr lang="en-US" sz="1600" dirty="0"/>
           </a:p>
@@ -1152,7 +1246,7 @@
 </p:sld>
 </file>
 
-<file path=ppt/slides/slide18.xml><?xml version="1.0" encoding="utf-8"?>
+<file path=ppt/slides/slide2.xml><?xml version="1.0" encoding="utf-8"?>
 <p:sld xmlns:a="http://schemas.openxmlformats.org/drawingml/2006/main" xmlns:r="http://schemas.openxmlformats.org/officeDocument/2006/relationships" xmlns:p="http://schemas.openxmlformats.org/presentationml/2006/main">
   <p:cSld>
     <p:spTree>
@@ -1707,7 +1801,7 @@
                 <a:ea typeface="Calibri" pitchFamily="34" charset="-122"/>
                 <a:cs typeface="Calibri" pitchFamily="34" charset="-120"/>
               </a:rPr>
-              <a:t>One scan, so no real comparison yet: the project builds the method and tests what it can detect.</a:t>
+              <a:t>One scan, so no real comparison yet: the project builds the method and tests it.</a:t>
             </a:r>
             <a:endParaRPr lang="en-US" sz="1200" dirty="0"/>
           </a:p>
@@ -1749,53 +1843,14 @@
       </p:sp>
       <p:sp>
         <p:nvSpPr>
-          <p:cNvPr id="18" name="Text 5"/>
-          <p:cNvSpPr txBox="1"/>
-          <p:nvPr/>
-        </p:nvSpPr>
-        <p:spPr>
-          <a:xfrm>
-            <a:off x="512064" y="3364992"/>
-            <a:ext cx="914400" cy="731520"/>
-          </a:xfrm>
-          <a:prstGeom prst="rect">
-            <a:avLst/>
-          </a:prstGeom>
-          <a:noFill/>
-          <a:ln/>
-        </p:spPr>
-        <p:txBody>
-          <a:bodyPr wrap="square" lIns="0" tIns="0" rIns="0" bIns="0" rtlCol="0" anchor="ctr"/>
-          <a:lstStyle/>
-          <a:p>
-            <a:pPr marL="0" indent="0" algn="ctr">
-              <a:buNone/>
-            </a:pPr>
-            <a:r>
-              <a:rPr lang="en-US" sz="1800" b="1" dirty="0">
-                <a:solidFill>
-                  <a:srgbClr val="028090"/>
-                </a:solidFill>
-                <a:latin typeface="Cambria" pitchFamily="34" charset="0"/>
-                <a:ea typeface="Cambria" pitchFamily="34" charset="-122"/>
-                <a:cs typeface="Cambria" pitchFamily="34" charset="-120"/>
-              </a:rPr>
-              <a:t>1</a:t>
-            </a:r>
-            <a:endParaRPr lang="en-US" sz="1800" dirty="0"/>
-          </a:p>
-        </p:txBody>
-      </p:sp>
-      <p:sp>
-        <p:nvSpPr>
           <p:cNvPr id="19" name="Text 6"/>
           <p:cNvSpPr txBox="1"/>
           <p:nvPr/>
         </p:nvSpPr>
         <p:spPr>
           <a:xfrm>
-            <a:off x="1444752" y="3438144"/>
-            <a:ext cx="1572768" cy="237744"/>
+            <a:off x="658368" y="3438144"/>
+            <a:ext cx="2286000" cy="237744"/>
           </a:xfrm>
           <a:prstGeom prst="rect">
             <a:avLst/>
@@ -1819,7 +1874,7 @@
                 <a:ea typeface="Calibri" pitchFamily="34" charset="-122"/>
                 <a:cs typeface="Calibri" pitchFamily="34" charset="-120"/>
               </a:rPr>
-              <a:t>LiDAR scan of the track</a:t>
+              <a:t>One LiDAR scan</a:t>
             </a:r>
             <a:endParaRPr lang="en-US" sz="1100" dirty="0"/>
           </a:p>
@@ -1833,8 +1888,8 @@
         </p:nvSpPr>
         <p:spPr>
           <a:xfrm>
-            <a:off x="1444752" y="3675887"/>
-            <a:ext cx="1572768" cy="365760"/>
+            <a:off x="658368" y="3685032"/>
+            <a:ext cx="2286000" cy="347472"/>
           </a:xfrm>
           <a:prstGeom prst="rect">
             <a:avLst/>
@@ -1858,7 +1913,7 @@
                 <a:ea typeface="Calibri" pitchFamily="34" charset="-122"/>
                 <a:cs typeface="Calibri" pitchFamily="34" charset="-120"/>
               </a:rPr>
-              <a:t>15.9 M points, about 260 m of double track</a:t>
+              <a:t>a 3D point cloud of a stretch of double track</a:t>
             </a:r>
             <a:endParaRPr lang="en-US" sz="900" dirty="0"/>
           </a:p>
@@ -1900,53 +1955,14 @@
       </p:sp>
       <p:sp>
         <p:nvSpPr>
-          <p:cNvPr id="22" name="Text 5"/>
-          <p:cNvSpPr txBox="1"/>
-          <p:nvPr/>
-        </p:nvSpPr>
-        <p:spPr>
-          <a:xfrm>
-            <a:off x="3314700" y="3364992"/>
-            <a:ext cx="914400" cy="731520"/>
-          </a:xfrm>
-          <a:prstGeom prst="rect">
-            <a:avLst/>
-          </a:prstGeom>
-          <a:noFill/>
-          <a:ln/>
-        </p:spPr>
-        <p:txBody>
-          <a:bodyPr wrap="square" lIns="0" tIns="0" rIns="0" bIns="0" rtlCol="0" anchor="ctr"/>
-          <a:lstStyle/>
-          <a:p>
-            <a:pPr marL="0" indent="0" algn="ctr">
-              <a:buNone/>
-            </a:pPr>
-            <a:r>
-              <a:rPr lang="en-US" sz="1800" b="1" dirty="0">
-                <a:solidFill>
-                  <a:srgbClr val="028090"/>
-                </a:solidFill>
-                <a:latin typeface="Cambria" pitchFamily="34" charset="0"/>
-                <a:ea typeface="Cambria" pitchFamily="34" charset="-122"/>
-                <a:cs typeface="Cambria" pitchFamily="34" charset="-120"/>
-              </a:rPr>
-              <a:t>0</a:t>
-            </a:r>
-            <a:endParaRPr lang="en-US" sz="1800" dirty="0"/>
-          </a:p>
-        </p:txBody>
-      </p:sp>
-      <p:sp>
-        <p:nvSpPr>
           <p:cNvPr id="23" name="Text 6"/>
           <p:cNvSpPr txBox="1"/>
           <p:nvPr/>
         </p:nvSpPr>
         <p:spPr>
           <a:xfrm>
-            <a:off x="4247388" y="3438144"/>
-            <a:ext cx="1572768" cy="237744"/>
+            <a:off x="3461004" y="3438144"/>
+            <a:ext cx="2286000" cy="237744"/>
           </a:xfrm>
           <a:prstGeom prst="rect">
             <a:avLst/>
@@ -1970,7 +1986,7 @@
                 <a:ea typeface="Calibri" pitchFamily="34" charset="-122"/>
                 <a:cs typeface="Calibri" pitchFamily="34" charset="-120"/>
               </a:rPr>
-              <a:t>vibration data</a:t>
+              <a:t>No second scan</a:t>
             </a:r>
             <a:endParaRPr lang="en-US" sz="1100" dirty="0"/>
           </a:p>
@@ -1984,8 +2000,8 @@
         </p:nvSpPr>
         <p:spPr>
           <a:xfrm>
-            <a:off x="4247388" y="3675887"/>
-            <a:ext cx="1572768" cy="365760"/>
+            <a:off x="3461004" y="3685032"/>
+            <a:ext cx="2286000" cy="347472"/>
           </a:xfrm>
           <a:prstGeom prst="rect">
             <a:avLst/>
@@ -2009,7 +2025,7 @@
                 <a:ea typeface="Calibri" pitchFamily="34" charset="-122"/>
                 <a:cs typeface="Calibri" pitchFamily="34" charset="-120"/>
               </a:rPr>
-              <a:t>and no second run, timestamps or coordinate system</a:t>
+              <a:t>so two runs of the track cannot be compared yet</a:t>
             </a:r>
             <a:endParaRPr lang="en-US" sz="900" dirty="0"/>
           </a:p>
@@ -2051,53 +2067,14 @@
       </p:sp>
       <p:sp>
         <p:nvSpPr>
-          <p:cNvPr id="26" name="Text 5"/>
-          <p:cNvSpPr txBox="1"/>
-          <p:nvPr/>
-        </p:nvSpPr>
-        <p:spPr>
-          <a:xfrm>
-            <a:off x="6117336" y="3364992"/>
-            <a:ext cx="914400" cy="731520"/>
-          </a:xfrm>
-          <a:prstGeom prst="rect">
-            <a:avLst/>
-          </a:prstGeom>
-          <a:noFill/>
-          <a:ln/>
-        </p:spPr>
-        <p:txBody>
-          <a:bodyPr wrap="square" lIns="0" tIns="0" rIns="0" bIns="0" rtlCol="0" anchor="ctr"/>
-          <a:lstStyle/>
-          <a:p>
-            <a:pPr marL="0" indent="0" algn="ctr">
-              <a:buNone/>
-            </a:pPr>
-            <a:r>
-              <a:rPr lang="en-US" sz="1800" b="1" dirty="0">
-                <a:solidFill>
-                  <a:srgbClr val="028090"/>
-                </a:solidFill>
-                <a:latin typeface="Cambria" pitchFamily="34" charset="0"/>
-                <a:ea typeface="Cambria" pitchFamily="34" charset="-122"/>
-                <a:cs typeface="Cambria" pitchFamily="34" charset="-120"/>
-              </a:rPr>
-              <a:t>1 of 5</a:t>
-            </a:r>
-            <a:endParaRPr lang="en-US" sz="1800" dirty="0"/>
-          </a:p>
-        </p:txBody>
-      </p:sp>
-      <p:sp>
-        <p:nvSpPr>
           <p:cNvPr id="27" name="Text 6"/>
           <p:cNvSpPr txBox="1"/>
           <p:nvPr/>
         </p:nvSpPr>
         <p:spPr>
           <a:xfrm>
-            <a:off x="7050024" y="3438144"/>
-            <a:ext cx="1572768" cy="237744"/>
+            <a:off x="6263640" y="3438144"/>
+            <a:ext cx="2286000" cy="237744"/>
           </a:xfrm>
           <a:prstGeom prst="rect">
             <a:avLst/>
@@ -2121,7 +2098,7 @@
                 <a:ea typeface="Calibri" pitchFamily="34" charset="-122"/>
                 <a:cs typeface="Calibri" pitchFamily="34" charset="-120"/>
               </a:rPr>
-              <a:t>TQI parameters</a:t>
+              <a:t>Height from the sensor</a:t>
             </a:r>
             <a:endParaRPr lang="en-US" sz="1100" dirty="0"/>
           </a:p>
@@ -2135,8 +2112,8 @@
         </p:nvSpPr>
         <p:spPr>
           <a:xfrm>
-            <a:off x="7050024" y="3675887"/>
-            <a:ext cx="1572768" cy="365760"/>
+            <a:off x="6263640" y="3685032"/>
+            <a:ext cx="2286000" cy="347472"/>
           </a:xfrm>
           <a:prstGeom prst="rect">
             <a:avLst/>
@@ -2160,7 +2137,7 @@
                 <a:ea typeface="Calibri" pitchFamily="34" charset="-122"/>
                 <a:cs typeface="Calibri" pitchFamily="34" charset="-120"/>
               </a:rPr>
-              <a:t>gauge, plus alignment; height is relative to the sensor</a:t>
+              <a:t>so gauge and alignment can be followed; height only for short dips</a:t>
             </a:r>
             <a:endParaRPr lang="en-US" sz="900" dirty="0"/>
           </a:p>
@@ -2174,7 +2151,7 @@
 </p:sld>
 </file>
 
-<file path=ppt/slides/slide19.xml><?xml version="1.0" encoding="utf-8"?>
+<file path=ppt/slides/slide3.xml><?xml version="1.0" encoding="utf-8"?>
 <p:sld xmlns:a="http://schemas.openxmlformats.org/drawingml/2006/main" xmlns:r="http://schemas.openxmlformats.org/officeDocument/2006/relationships" xmlns:p="http://schemas.openxmlformats.org/presentationml/2006/main">
   <p:cSld>
     <p:spTree>
@@ -2263,7 +2240,7 @@
                 <a:ea typeface="Cambria" pitchFamily="34" charset="-122"/>
                 <a:cs typeface="Cambria" pitchFamily="34" charset="-120"/>
               </a:rPr>
-              <a:t>One run becomes one repeatable 3D curve</a:t>
+              <a:t>One scan becomes one repeatable 3D curve</a:t>
             </a:r>
             <a:endParaRPr lang="en-US" sz="2700" dirty="0"/>
           </a:p>
@@ -2373,7 +2350,7 @@
                 <a:ea typeface="Calibri" pitchFamily="34" charset="-122"/>
                 <a:cs typeface="Calibri" pitchFamily="34" charset="-120"/>
               </a:rPr>
-              <a:t>Reference</a:t>
+              <a:t>Reference line</a:t>
             </a:r>
             <a:endParaRPr lang="en-US" sz="1400" dirty="0"/>
           </a:p>
@@ -2412,7 +2389,7 @@
                 <a:ea typeface="Calibri" pitchFamily="34" charset="-122"/>
                 <a:cs typeface="Calibri" pitchFamily="34" charset="-120"/>
               </a:rPr>
-              <a:t>one track centreline from the first run, used for every run</a:t>
+              <a:t>one fixed line along the track; every run is projected onto it</a:t>
             </a:r>
             <a:endParaRPr lang="en-US" sz="1100" dirty="0"/>
           </a:p>
@@ -2522,7 +2499,7 @@
                 <a:ea typeface="Calibri" pitchFamily="34" charset="-122"/>
                 <a:cs typeface="Calibri" pitchFamily="34" charset="-120"/>
               </a:rPr>
-              <a:t>Rails</a:t>
+              <a:t>Rail heads</a:t>
             </a:r>
             <a:endParaRPr lang="en-US" sz="1400" dirty="0"/>
           </a:p>
@@ -2561,7 +2538,7 @@
                 <a:ea typeface="Calibri" pitchFamily="34" charset="-122"/>
                 <a:cs typeface="Calibri" pitchFamily="34" charset="-120"/>
               </a:rPr>
-              <a:t>rail head and gauge face located in every 25 cm of track</a:t>
+              <a:t>in every short slab, find the top of each rail and its inner face</a:t>
             </a:r>
             <a:endParaRPr lang="en-US" sz="1100" dirty="0"/>
           </a:p>
@@ -2710,7 +2687,7 @@
                 <a:ea typeface="Calibri" pitchFamily="34" charset="-122"/>
                 <a:cs typeface="Calibri" pitchFamily="34" charset="-120"/>
               </a:rPr>
-              <a:t>1 m averages on a fixed grid, so runs line up</a:t>
+              <a:t>average the slabs at regular steps along the track</a:t>
             </a:r>
             <a:endParaRPr lang="en-US" sz="1100" dirty="0"/>
           </a:p>
@@ -2859,7 +2836,7 @@
                 <a:ea typeface="Calibri" pitchFamily="34" charset="-122"/>
                 <a:cs typeface="Calibri" pitchFamily="34" charset="-120"/>
               </a:rPr>
-              <a:t>a curve through every control point; a change stays local</a:t>
+              <a:t>a smooth curve through every control point; a change stays local</a:t>
             </a:r>
             <a:endParaRPr lang="en-US" sz="1100" dirty="0"/>
           </a:p>
@@ -2969,7 +2946,7 @@
                 <a:ea typeface="Calibri" pitchFamily="34" charset="-122"/>
                 <a:cs typeface="Calibri" pitchFamily="34" charset="-120"/>
               </a:rPr>
-              <a:t>Compare</a:t>
+              <a:t>Read off</a:t>
             </a:r>
             <a:endParaRPr lang="en-US" sz="1400" dirty="0"/>
           </a:p>
@@ -3008,7 +2985,7 @@
                 <a:ea typeface="Calibri" pitchFamily="34" charset="-122"/>
                 <a:cs typeface="Calibri" pitchFamily="34" charset="-120"/>
               </a:rPr>
-              <a:t>subtract two runs point for point: gauge, alignment, TQI</a:t>
+              <a:t>gauge, alignment and the index per section, from the same curve</a:t>
             </a:r>
             <a:endParaRPr lang="en-US" sz="1100" dirty="0"/>
           </a:p>
@@ -3071,7 +3048,7 @@
                 <a:ea typeface="Calibri" pitchFamily="34" charset="-122"/>
                 <a:cs typeface="Calibri" pitchFamily="34" charset="-120"/>
               </a:rPr>
-              <a:t>Left rail, 15 m of the run. A curve through every slab copies the noise; one through 1 m control points does not.</a:t>
+              <a:t>A curve through every raw measurement copies the noise; one through the control points does not.</a:t>
             </a:r>
             <a:endParaRPr lang="en-US" sz="950" dirty="0"/>
           </a:p>
@@ -3085,7 +3062,7 @@
 </p:sld>
 </file>
 
-<file path=ppt/slides/slide20.xml><?xml version="1.0" encoding="utf-8"?>
+<file path=ppt/slides/slide4.xml><?xml version="1.0" encoding="utf-8"?>
 <p:sld xmlns:a="http://schemas.openxmlformats.org/drawingml/2006/main" xmlns:r="http://schemas.openxmlformats.org/officeDocument/2006/relationships" xmlns:p="http://schemas.openxmlformats.org/presentationml/2006/main">
   <p:cSld>
     <p:spTree>
@@ -3135,7 +3112,7 @@
                 <a:ea typeface="Calibri" pitchFamily="34" charset="-122"/>
                 <a:cs typeface="Calibri" pitchFamily="34" charset="-120"/>
               </a:rPr>
-              <a:t>TEST ON THE REAL SCAN</a:t>
+              <a:t>TEST PLAN</a:t>
             </a:r>
             <a:endParaRPr lang="en-US" sz="1100" dirty="0"/>
           </a:p>
@@ -3174,7 +3151,7 @@
                 <a:ea typeface="Cambria" pitchFamily="34" charset="-122"/>
                 <a:cs typeface="Cambria" pitchFamily="34" charset="-120"/>
               </a:rPr>
-              <a:t>How small a change can it see?</a:t>
+              <a:t>How the method is tested with one scan</a:t>
             </a:r>
             <a:endParaRPr lang="en-US" sz="2700" dirty="0"/>
           </a:p>
@@ -3188,7 +3165,7 @@
         </p:nvSpPr>
         <p:spPr>
           <a:xfrm>
-            <a:off x="457200" y="4315968"/>
+            <a:off x="457200" y="3913632"/>
             <a:ext cx="4572000" cy="365760"/>
           </a:xfrm>
           <a:prstGeom prst="rect">
@@ -3213,7 +3190,7 @@
                 <a:ea typeface="Calibri" pitchFamily="34" charset="-122"/>
                 <a:cs typeface="Calibri" pitchFamily="34" charset="-120"/>
               </a:rPr>
-              <a:t>Run A is one half of the scan; run B is the other half with a known 4 mm gauge widening added at 100–120 m. Shaded: the noise floor.</a:t>
+              <a:t>Also tried: control points closer together or further apart, to see what the curve keeps and what it smooths away.</a:t>
             </a:r>
             <a:endParaRPr lang="en-US" sz="950" dirty="0"/>
           </a:p>
@@ -3278,7 +3255,7 @@
               <a:buNone/>
             </a:pPr>
             <a:r>
-              <a:rPr lang="en-US" sz="1800" b="1" dirty="0">
+              <a:rPr lang="en-US" sz="1500" b="1" dirty="0">
                 <a:solidFill>
                   <a:srgbClr val="028090"/>
                 </a:solidFill>
@@ -3286,7 +3263,7 @@
                 <a:ea typeface="Cambria" pitchFamily="34" charset="-122"/>
                 <a:cs typeface="Cambria" pitchFamily="34" charset="-120"/>
               </a:rPr>
-              <a:t>0.9 mm</a:t>
+              <a:t>Repeat</a:t>
             </a:r>
             <a:endParaRPr lang="en-US" sz="1800" dirty="0"/>
           </a:p>
@@ -3325,7 +3302,7 @@
                 <a:ea typeface="Calibri" pitchFamily="34" charset="-122"/>
                 <a:cs typeface="Calibri" pitchFamily="34" charset="-120"/>
               </a:rPr>
-              <a:t>noise floor, gauge</a:t>
+              <a:t>the same points, twice</a:t>
             </a:r>
             <a:endParaRPr lang="en-US" sz="1100" dirty="0"/>
           </a:p>
@@ -3364,7 +3341,7 @@
                 <a:ea typeface="Calibri" pitchFamily="34" charset="-122"/>
                 <a:cs typeface="Calibri" pitchFamily="34" charset="-120"/>
               </a:rPr>
-              <a:t>sideways 1.4–1.5 mm, height 0.4 mm; two halves of the scan compared</a:t>
+              <a:t>the same scan must give exactly the same curve</a:t>
             </a:r>
             <a:endParaRPr lang="en-US" sz="900" dirty="0"/>
           </a:p>
@@ -3429,7 +3406,7 @@
               <a:buNone/>
             </a:pPr>
             <a:r>
-              <a:rPr lang="en-US" sz="1800" b="1" dirty="0">
+              <a:rPr lang="en-US" sz="1500" b="1" dirty="0">
                 <a:solidFill>
                   <a:srgbClr val="028090"/>
                 </a:solidFill>
@@ -3437,7 +3414,7 @@
                 <a:ea typeface="Cambria" pitchFamily="34" charset="-122"/>
                 <a:cs typeface="Cambria" pitchFamily="34" charset="-120"/>
               </a:rPr>
-              <a:t>3.9 mm</a:t>
+              <a:t>Noise</a:t>
             </a:r>
             <a:endParaRPr lang="en-US" sz="1800" dirty="0"/>
           </a:p>
@@ -3476,7 +3453,7 @@
                 <a:ea typeface="Calibri" pitchFamily="34" charset="-122"/>
                 <a:cs typeface="Calibri" pitchFamily="34" charset="-120"/>
               </a:rPr>
-              <a:t>of 4 mm recovered</a:t>
+              <a:t>Scan 1 against Scan 2</a:t>
             </a:r>
             <a:endParaRPr lang="en-US" sz="1100" dirty="0"/>
           </a:p>
@@ -3515,7 +3492,7 @@
                 <a:ea typeface="Calibri" pitchFamily="34" charset="-122"/>
                 <a:cs typeface="Calibri" pitchFamily="34" charset="-120"/>
               </a:rPr>
-              <a:t>a known gauge widening added to one half; found along its whole length</a:t>
+              <a:t>nothing changed, so the difference is the method's own noise</a:t>
             </a:r>
             <a:endParaRPr lang="en-US" sz="900" dirty="0"/>
           </a:p>
@@ -3580,7 +3557,7 @@
               <a:buNone/>
             </a:pPr>
             <a:r>
-              <a:rPr lang="en-US" sz="1800" b="1" dirty="0">
+              <a:rPr lang="en-US" sz="1500" b="1" dirty="0">
                 <a:solidFill>
                   <a:srgbClr val="028090"/>
                 </a:solidFill>
@@ -3588,7 +3565,7 @@
                 <a:ea typeface="Cambria" pitchFamily="34" charset="-122"/>
                 <a:cs typeface="Cambria" pitchFamily="34" charset="-120"/>
               </a:rPr>
-              <a:t>155 m</a:t>
+              <a:t>Faults</a:t>
             </a:r>
             <a:endParaRPr lang="en-US" sz="1800" dirty="0"/>
           </a:p>
@@ -3627,7 +3604,7 @@
                 <a:ea typeface="Calibri" pitchFamily="34" charset="-122"/>
                 <a:cs typeface="Calibri" pitchFamily="34" charset="-120"/>
               </a:rPr>
-              <a:t>gauge step found</a:t>
+              <a:t>known faults planted in Scan 2</a:t>
             </a:r>
             <a:endParaRPr lang="en-US" sz="1100" dirty="0"/>
           </a:p>
@@ -3666,36 +3643,582 @@
                 <a:ea typeface="Calibri" pitchFamily="34" charset="-122"/>
                 <a:cs typeface="Calibri" pitchFamily="34" charset="-120"/>
               </a:rPr>
-              <a:t>3–4 mm within a metre in the real track; it looks like a rail joint</a:t>
+              <a:t>a widening, a dipped joint, a twist, a cross-level step: found, at their size?</a:t>
             </a:r>
             <a:endParaRPr lang="en-US" sz="900" dirty="0"/>
           </a:p>
         </p:txBody>
       </p:sp>
-      <p:pic>
-        <p:nvPicPr>
-          <p:cNvPr id="18" name="Picture 17" descr="f8_compare_runs.png"/>
-          <p:cNvPicPr>
-            <a:picLocks noChangeAspect="1"/>
-          </p:cNvPicPr>
-          <p:nvPr/>
-        </p:nvPicPr>
-        <p:blipFill>
-          <a:blip r:embed="rId2"/>
-          <a:stretch>
-            <a:fillRect/>
-          </a:stretch>
-        </p:blipFill>
-        <p:spPr>
-          <a:xfrm>
-            <a:off x="457200" y="1188720"/>
-            <a:ext cx="4572000" cy="3081528"/>
-          </a:xfrm>
-          <a:prstGeom prst="rect">
-            <a:avLst/>
-          </a:prstGeom>
-        </p:spPr>
-      </p:pic>
+      <p:sp>
+        <p:nvSpPr>
+          <p:cNvPr id="18" name="Shape 4"/>
+          <p:cNvSpPr/>
+          <p:nvPr/>
+        </p:nvSpPr>
+        <p:spPr>
+          <a:xfrm>
+            <a:off x="457200" y="2450592"/>
+            <a:ext cx="1051560" cy="914400"/>
+          </a:xfrm>
+          <a:prstGeom prst="roundRect">
+            <a:avLst>
+              <a:gd name="adj" fmla="val 9375"/>
+            </a:avLst>
+          </a:prstGeom>
+          <a:solidFill>
+            <a:srgbClr val="EDF5F5"/>
+          </a:solidFill>
+          <a:ln w="12700">
+            <a:solidFill>
+              <a:srgbClr val="EDF5F5"/>
+            </a:solidFill>
+            <a:prstDash val="solid"/>
+          </a:ln>
+        </p:spPr>
+        <p:txBody>
+          <a:bodyPr/>
+          <a:lstStyle/>
+          <a:p>
+            <a:endParaRPr lang="sv-SE"/>
+          </a:p>
+        </p:txBody>
+      </p:sp>
+      <p:sp>
+        <p:nvSpPr>
+          <p:cNvPr id="19" name="Text 6"/>
+          <p:cNvSpPr txBox="1"/>
+          <p:nvPr/>
+        </p:nvSpPr>
+        <p:spPr>
+          <a:xfrm>
+            <a:off x="457200" y="2523744"/>
+            <a:ext cx="1051560" cy="274320"/>
+          </a:xfrm>
+          <a:prstGeom prst="rect">
+            <a:avLst/>
+          </a:prstGeom>
+          <a:noFill/>
+          <a:ln/>
+        </p:spPr>
+        <p:txBody>
+          <a:bodyPr wrap="square" lIns="0" tIns="0" rIns="0" bIns="0" rtlCol="0" anchor="ctr"/>
+          <a:lstStyle/>
+          <a:p>
+            <a:pPr marL="0" indent="0" algn="ctr">
+              <a:buNone/>
+            </a:pPr>
+            <a:r>
+              <a:rPr lang="en-US" sz="1200" b="1" dirty="0">
+                <a:solidFill>
+                  <a:srgbClr val="16262B"/>
+                </a:solidFill>
+                <a:latin typeface="Calibri" pitchFamily="34" charset="0"/>
+                <a:ea typeface="Calibri" pitchFamily="34" charset="-122"/>
+                <a:cs typeface="Calibri" pitchFamily="34" charset="-120"/>
+              </a:rPr>
+              <a:t>One scan</a:t>
+            </a:r>
+            <a:endParaRPr lang="en-US" sz="1100" dirty="0"/>
+          </a:p>
+        </p:txBody>
+      </p:sp>
+      <p:sp>
+        <p:nvSpPr>
+          <p:cNvPr id="20" name="Text 7"/>
+          <p:cNvSpPr txBox="1"/>
+          <p:nvPr/>
+        </p:nvSpPr>
+        <p:spPr>
+          <a:xfrm>
+            <a:off x="502920" y="2798064"/>
+            <a:ext cx="960119" cy="384048"/>
+          </a:xfrm>
+          <a:prstGeom prst="rect">
+            <a:avLst/>
+          </a:prstGeom>
+          <a:noFill/>
+          <a:ln/>
+        </p:spPr>
+        <p:txBody>
+          <a:bodyPr wrap="square" lIns="0" tIns="0" rIns="0" bIns="0" rtlCol="0" anchor="ctr"/>
+          <a:lstStyle/>
+          <a:p>
+            <a:pPr marL="0" indent="0" algn="ctr">
+              <a:buNone/>
+            </a:pPr>
+            <a:r>
+              <a:rPr lang="en-US" sz="900" dirty="0">
+                <a:solidFill>
+                  <a:srgbClr val="5F7178"/>
+                </a:solidFill>
+                <a:latin typeface="Calibri" pitchFamily="34" charset="0"/>
+                <a:ea typeface="Calibri" pitchFamily="34" charset="-122"/>
+                <a:cs typeface="Calibri" pitchFamily="34" charset="-120"/>
+              </a:rPr>
+              <a:t>all its points</a:t>
+            </a:r>
+            <a:endParaRPr lang="en-US" sz="900" dirty="0"/>
+          </a:p>
+        </p:txBody>
+      </p:sp>
+      <p:sp>
+        <p:nvSpPr>
+          <p:cNvPr id="21" name="Shape 4"/>
+          <p:cNvSpPr/>
+          <p:nvPr/>
+        </p:nvSpPr>
+        <p:spPr>
+          <a:xfrm>
+            <a:off x="2057400" y="2084831"/>
+            <a:ext cx="1371600" cy="786384"/>
+          </a:xfrm>
+          <a:prstGeom prst="roundRect">
+            <a:avLst>
+              <a:gd name="adj" fmla="val 9375"/>
+            </a:avLst>
+          </a:prstGeom>
+          <a:solidFill>
+            <a:srgbClr val="EDF5F5"/>
+          </a:solidFill>
+          <a:ln w="12700">
+            <a:solidFill>
+              <a:srgbClr val="EDF5F5"/>
+            </a:solidFill>
+            <a:prstDash val="solid"/>
+          </a:ln>
+        </p:spPr>
+        <p:txBody>
+          <a:bodyPr/>
+          <a:lstStyle/>
+          <a:p>
+            <a:endParaRPr lang="sv-SE"/>
+          </a:p>
+        </p:txBody>
+      </p:sp>
+      <p:sp>
+        <p:nvSpPr>
+          <p:cNvPr id="22" name="Text 6"/>
+          <p:cNvSpPr txBox="1"/>
+          <p:nvPr/>
+        </p:nvSpPr>
+        <p:spPr>
+          <a:xfrm>
+            <a:off x="2057400" y="2157984"/>
+            <a:ext cx="1371600" cy="274320"/>
+          </a:xfrm>
+          <a:prstGeom prst="rect">
+            <a:avLst/>
+          </a:prstGeom>
+          <a:noFill/>
+          <a:ln/>
+        </p:spPr>
+        <p:txBody>
+          <a:bodyPr wrap="square" lIns="0" tIns="0" rIns="0" bIns="0" rtlCol="0" anchor="ctr"/>
+          <a:lstStyle/>
+          <a:p>
+            <a:pPr marL="0" indent="0" algn="ctr">
+              <a:buNone/>
+            </a:pPr>
+            <a:r>
+              <a:rPr lang="en-US" sz="1200" b="1" dirty="0">
+                <a:solidFill>
+                  <a:srgbClr val="16262B"/>
+                </a:solidFill>
+                <a:latin typeface="Calibri" pitchFamily="34" charset="0"/>
+                <a:ea typeface="Calibri" pitchFamily="34" charset="-122"/>
+                <a:cs typeface="Calibri" pitchFamily="34" charset="-120"/>
+              </a:rPr>
+              <a:t>Scan 1</a:t>
+            </a:r>
+            <a:endParaRPr lang="en-US" sz="1100" dirty="0"/>
+          </a:p>
+        </p:txBody>
+      </p:sp>
+      <p:sp>
+        <p:nvSpPr>
+          <p:cNvPr id="23" name="Text 7"/>
+          <p:cNvSpPr txBox="1"/>
+          <p:nvPr/>
+        </p:nvSpPr>
+        <p:spPr>
+          <a:xfrm>
+            <a:off x="2103120" y="2432303"/>
+            <a:ext cx="1280160" cy="384048"/>
+          </a:xfrm>
+          <a:prstGeom prst="rect">
+            <a:avLst/>
+          </a:prstGeom>
+          <a:noFill/>
+          <a:ln/>
+        </p:spPr>
+        <p:txBody>
+          <a:bodyPr wrap="square" lIns="0" tIns="0" rIns="0" bIns="0" rtlCol="0" anchor="ctr"/>
+          <a:lstStyle/>
+          <a:p>
+            <a:pPr marL="0" indent="0" algn="ctr">
+              <a:buNone/>
+            </a:pPr>
+            <a:r>
+              <a:rPr lang="en-US" sz="900" dirty="0">
+                <a:solidFill>
+                  <a:srgbClr val="5F7178"/>
+                </a:solidFill>
+                <a:latin typeface="Calibri" pitchFamily="34" charset="0"/>
+                <a:ea typeface="Calibri" pitchFamily="34" charset="-122"/>
+                <a:cs typeface="Calibri" pitchFamily="34" charset="-120"/>
+              </a:rPr>
+              <a:t>every other handful of points</a:t>
+            </a:r>
+            <a:endParaRPr lang="en-US" sz="900" dirty="0"/>
+          </a:p>
+        </p:txBody>
+      </p:sp>
+      <p:sp>
+        <p:nvSpPr>
+          <p:cNvPr id="24" name="Shape 4"/>
+          <p:cNvSpPr/>
+          <p:nvPr/>
+        </p:nvSpPr>
+        <p:spPr>
+          <a:xfrm>
+            <a:off x="2057400" y="2962656"/>
+            <a:ext cx="1371600" cy="786384"/>
+          </a:xfrm>
+          <a:prstGeom prst="roundRect">
+            <a:avLst>
+              <a:gd name="adj" fmla="val 9375"/>
+            </a:avLst>
+          </a:prstGeom>
+          <a:solidFill>
+            <a:srgbClr val="EDF5F5"/>
+          </a:solidFill>
+          <a:ln w="12700">
+            <a:solidFill>
+              <a:srgbClr val="EDF5F5"/>
+            </a:solidFill>
+            <a:prstDash val="solid"/>
+          </a:ln>
+        </p:spPr>
+        <p:txBody>
+          <a:bodyPr/>
+          <a:lstStyle/>
+          <a:p>
+            <a:endParaRPr lang="sv-SE"/>
+          </a:p>
+        </p:txBody>
+      </p:sp>
+      <p:sp>
+        <p:nvSpPr>
+          <p:cNvPr id="25" name="Text 6"/>
+          <p:cNvSpPr txBox="1"/>
+          <p:nvPr/>
+        </p:nvSpPr>
+        <p:spPr>
+          <a:xfrm>
+            <a:off x="2057400" y="3035808"/>
+            <a:ext cx="1371600" cy="274320"/>
+          </a:xfrm>
+          <a:prstGeom prst="rect">
+            <a:avLst/>
+          </a:prstGeom>
+          <a:noFill/>
+          <a:ln/>
+        </p:spPr>
+        <p:txBody>
+          <a:bodyPr wrap="square" lIns="0" tIns="0" rIns="0" bIns="0" rtlCol="0" anchor="ctr"/>
+          <a:lstStyle/>
+          <a:p>
+            <a:pPr marL="0" indent="0" algn="ctr">
+              <a:buNone/>
+            </a:pPr>
+            <a:r>
+              <a:rPr lang="en-US" sz="1200" b="1" dirty="0">
+                <a:solidFill>
+                  <a:srgbClr val="16262B"/>
+                </a:solidFill>
+                <a:latin typeface="Calibri" pitchFamily="34" charset="0"/>
+                <a:ea typeface="Calibri" pitchFamily="34" charset="-122"/>
+                <a:cs typeface="Calibri" pitchFamily="34" charset="-120"/>
+              </a:rPr>
+              <a:t>Scan 2</a:t>
+            </a:r>
+            <a:endParaRPr lang="en-US" sz="1100" dirty="0"/>
+          </a:p>
+        </p:txBody>
+      </p:sp>
+      <p:sp>
+        <p:nvSpPr>
+          <p:cNvPr id="26" name="Text 7"/>
+          <p:cNvSpPr txBox="1"/>
+          <p:nvPr/>
+        </p:nvSpPr>
+        <p:spPr>
+          <a:xfrm>
+            <a:off x="2103120" y="3310128"/>
+            <a:ext cx="1280160" cy="384048"/>
+          </a:xfrm>
+          <a:prstGeom prst="rect">
+            <a:avLst/>
+          </a:prstGeom>
+          <a:noFill/>
+          <a:ln/>
+        </p:spPr>
+        <p:txBody>
+          <a:bodyPr wrap="square" lIns="0" tIns="0" rIns="0" bIns="0" rtlCol="0" anchor="ctr"/>
+          <a:lstStyle/>
+          <a:p>
+            <a:pPr marL="0" indent="0" algn="ctr">
+              <a:buNone/>
+            </a:pPr>
+            <a:r>
+              <a:rPr lang="en-US" sz="900" dirty="0">
+                <a:solidFill>
+                  <a:srgbClr val="5F7178"/>
+                </a:solidFill>
+                <a:latin typeface="Calibri" pitchFamily="34" charset="0"/>
+                <a:ea typeface="Calibri" pitchFamily="34" charset="-122"/>
+                <a:cs typeface="Calibri" pitchFamily="34" charset="-120"/>
+              </a:rPr>
+              <a:t>the handfuls in between</a:t>
+            </a:r>
+            <a:endParaRPr lang="en-US" sz="900" dirty="0"/>
+          </a:p>
+        </p:txBody>
+      </p:sp>
+      <p:sp>
+        <p:nvSpPr>
+          <p:cNvPr id="27" name="Shape 16"/>
+          <p:cNvSpPr/>
+          <p:nvPr/>
+        </p:nvSpPr>
+        <p:spPr>
+          <a:xfrm>
+            <a:off x="3977639" y="2450592"/>
+            <a:ext cx="1051560" cy="914400"/>
+          </a:xfrm>
+          <a:prstGeom prst="roundRect">
+            <a:avLst>
+              <a:gd name="adj" fmla="val 9091"/>
+            </a:avLst>
+          </a:prstGeom>
+          <a:solidFill>
+            <a:srgbClr val="0B2027"/>
+          </a:solidFill>
+          <a:ln w="12700">
+            <a:solidFill>
+              <a:srgbClr val="0B2027"/>
+            </a:solidFill>
+            <a:prstDash val="solid"/>
+          </a:ln>
+        </p:spPr>
+        <p:txBody>
+          <a:bodyPr/>
+          <a:lstStyle/>
+          <a:p>
+            <a:endParaRPr lang="sv-SE"/>
+          </a:p>
+        </p:txBody>
+      </p:sp>
+      <p:sp>
+        <p:nvSpPr>
+          <p:cNvPr id="28" name="TextBox 10"/>
+          <p:cNvSpPr txBox="1"/>
+          <p:nvPr/>
+        </p:nvSpPr>
+        <p:spPr>
+          <a:xfrm>
+            <a:off x="3977639" y="2450592"/>
+            <a:ext cx="1051560" cy="914400"/>
+          </a:xfrm>
+          <a:prstGeom prst="rect">
+            <a:avLst/>
+          </a:prstGeom>
+          <a:noFill/>
+        </p:spPr>
+        <p:txBody>
+          <a:bodyPr wrap="square" lIns="0" tIns="0" rIns="0" bIns="0" anchor="ctr">
+            <a:spAutoFit/>
+          </a:bodyPr>
+          <a:lstStyle/>
+          <a:p>
+            <a:pPr algn="ctr"/>
+            <a:r>
+              <a:rPr sz="1200" b="1">
+                <a:solidFill>
+                  <a:srgbClr val="FFFFFF"/>
+                </a:solidFill>
+                <a:latin typeface="Calibri"/>
+              </a:rPr>
+              <a:t>Compare</a:t>
+            </a:r>
+          </a:p>
+        </p:txBody>
+      </p:sp>
+      <p:sp>
+        <p:nvSpPr>
+          <p:cNvPr id="29" name="Right Arrow 7"/>
+          <p:cNvSpPr/>
+          <p:nvPr/>
+        </p:nvSpPr>
+        <p:spPr>
+          <a:xfrm>
+            <a:off x="1600200" y="2724912"/>
+            <a:ext cx="365760" cy="365760"/>
+          </a:xfrm>
+          <a:prstGeom prst="rightArrow">
+            <a:avLst/>
+          </a:prstGeom>
+          <a:solidFill>
+            <a:srgbClr val="028090"/>
+          </a:solidFill>
+          <a:ln>
+            <a:noFill/>
+          </a:ln>
+        </p:spPr>
+        <p:style>
+          <a:lnRef idx="1">
+            <a:schemeClr val="accent1"/>
+          </a:lnRef>
+          <a:fillRef idx="3">
+            <a:schemeClr val="accent1"/>
+          </a:fillRef>
+          <a:effectRef idx="2">
+            <a:schemeClr val="accent1"/>
+          </a:effectRef>
+          <a:fontRef idx="minor">
+            <a:schemeClr val="lt1"/>
+          </a:fontRef>
+        </p:style>
+        <p:txBody>
+          <a:bodyPr rtlCol="0" anchor="ctr"/>
+          <a:lstStyle/>
+          <a:p>
+            <a:pPr algn="ctr"/>
+            <a:endParaRPr/>
+          </a:p>
+        </p:txBody>
+      </p:sp>
+      <p:sp>
+        <p:nvSpPr>
+          <p:cNvPr id="30" name="Right Arrow 7"/>
+          <p:cNvSpPr/>
+          <p:nvPr/>
+        </p:nvSpPr>
+        <p:spPr>
+          <a:xfrm>
+            <a:off x="3520440" y="2724912"/>
+            <a:ext cx="365760" cy="365760"/>
+          </a:xfrm>
+          <a:prstGeom prst="rightArrow">
+            <a:avLst/>
+          </a:prstGeom>
+          <a:solidFill>
+            <a:srgbClr val="028090"/>
+          </a:solidFill>
+          <a:ln>
+            <a:noFill/>
+          </a:ln>
+        </p:spPr>
+        <p:style>
+          <a:lnRef idx="1">
+            <a:schemeClr val="accent1"/>
+          </a:lnRef>
+          <a:fillRef idx="3">
+            <a:schemeClr val="accent1"/>
+          </a:fillRef>
+          <a:effectRef idx="2">
+            <a:schemeClr val="accent1"/>
+          </a:effectRef>
+          <a:fontRef idx="minor">
+            <a:schemeClr val="lt1"/>
+          </a:fontRef>
+        </p:style>
+        <p:txBody>
+          <a:bodyPr rtlCol="0" anchor="ctr"/>
+          <a:lstStyle/>
+          <a:p>
+            <a:pPr algn="ctr"/>
+            <a:endParaRPr/>
+          </a:p>
+        </p:txBody>
+      </p:sp>
+      <p:sp>
+        <p:nvSpPr>
+          <p:cNvPr id="31" name="Shape 4"/>
+          <p:cNvSpPr/>
+          <p:nvPr/>
+        </p:nvSpPr>
+        <p:spPr>
+          <a:xfrm>
+            <a:off x="457200" y="1280160"/>
+            <a:ext cx="4572000" cy="658368"/>
+          </a:xfrm>
+          <a:prstGeom prst="roundRect">
+            <a:avLst>
+              <a:gd name="adj" fmla="val 9375"/>
+            </a:avLst>
+          </a:prstGeom>
+          <a:solidFill>
+            <a:srgbClr val="EDF5F5"/>
+          </a:solidFill>
+          <a:ln w="12700">
+            <a:solidFill>
+              <a:srgbClr val="EDF5F5"/>
+            </a:solidFill>
+            <a:prstDash val="solid"/>
+          </a:ln>
+        </p:spPr>
+        <p:txBody>
+          <a:bodyPr/>
+          <a:lstStyle/>
+          <a:p>
+            <a:endParaRPr lang="sv-SE"/>
+          </a:p>
+        </p:txBody>
+      </p:sp>
+      <p:sp>
+        <p:nvSpPr>
+          <p:cNvPr id="32" name="TextBox 13"/>
+          <p:cNvSpPr txBox="1"/>
+          <p:nvPr/>
+        </p:nvSpPr>
+        <p:spPr>
+          <a:xfrm>
+            <a:off x="621792" y="1280160"/>
+            <a:ext cx="4242816" cy="658368"/>
+          </a:xfrm>
+          <a:prstGeom prst="rect">
+            <a:avLst/>
+          </a:prstGeom>
+          <a:noFill/>
+        </p:spPr>
+        <p:txBody>
+          <a:bodyPr wrap="square" lIns="0" tIns="0" rIns="0" bIns="0" anchor="ctr">
+            <a:spAutoFit/>
+          </a:bodyPr>
+          <a:lstStyle/>
+          <a:p>
+            <a:r>
+              <a:rPr sz="1200" b="1">
+                <a:solidFill>
+                  <a:srgbClr val="028090"/>
+                </a:solidFill>
+                <a:latin typeface="Calibri"/>
+              </a:rPr>
+              <a:t>The problem.</a:t>
+            </a:r>
+            <a:r>
+              <a:rPr sz="1200" b="0">
+                <a:solidFill>
+                  <a:srgbClr val="16262B"/>
+                </a:solidFill>
+                <a:latin typeface="Calibri"/>
+              </a:rPr>
+              <a:t>  The method compares two scans, and there is only one. So two are made from it.</a:t>
+            </a:r>
+          </a:p>
+        </p:txBody>
+      </p:sp>
     </p:spTree>
   </p:cSld>
   <p:clrMapOvr>
@@ -3704,7 +4227,7 @@
 </p:sld>
 </file>
 
-<file path=ppt/slides/slide23.xml><?xml version="1.0" encoding="utf-8"?>
+<file path=ppt/slides/slide5.xml><?xml version="1.0" encoding="utf-8"?>
 <p:sld xmlns:a="http://schemas.openxmlformats.org/drawingml/2006/main" xmlns:r="http://schemas.openxmlformats.org/officeDocument/2006/relationships" xmlns:p="http://schemas.openxmlformats.org/presentationml/2006/main">
   <p:cSld>
     <p:spTree>
@@ -3793,7 +4316,7 @@
                 <a:ea typeface="Cambria" pitchFamily="34" charset="-122"/>
                 <a:cs typeface="Cambria" pitchFamily="34" charset="-120"/>
               </a:rPr>
-              <a:t>What monitoring over time would show</a:t>
+              <a:t>How the curve would be used over time</a:t>
             </a:r>
             <a:endParaRPr lang="en-US" sz="2700" dirty="0"/>
           </a:p>
@@ -3862,7 +4385,7 @@
                 </a:solidFill>
                 <a:latin typeface="Calibri"/>
               </a:rPr>
-              <a:t>ALARMS AND MAINTENANCE</a:t>
+              <a:t>WHAT HAPPENS</a:t>
             </a:r>
           </a:p>
         </p:txBody>
@@ -3902,7 +4425,7 @@
                 </a:solidFill>
                 <a:latin typeface="Calibri"/>
               </a:rPr>
-              <a:t>Week 10: alignment 3.6 mm, lining ordered</a:t>
+              <a:t>Runs every few weeks, all made from the one scan</a:t>
             </a:r>
           </a:p>
           <a:p>
@@ -3919,7 +4442,7 @@
                 </a:solidFill>
                 <a:latin typeface="Calibri"/>
               </a:rPr>
-              <a:t>Week 14: gauge 3.8 mm, gauge correction</a:t>
+              <a:t>Assumed defects grow a little each run</a:t>
             </a:r>
           </a:p>
           <a:p>
@@ -3936,7 +4459,7 @@
                 </a:solidFill>
                 <a:latin typeface="Calibri"/>
               </a:rPr>
-              <a:t>Week 20: alignment again, lining</a:t>
+              <a:t>An alert when a place steps out of its normal scatter</a:t>
             </a:r>
           </a:p>
           <a:p>
@@ -3953,7 +4476,7 @@
                 </a:solidFill>
                 <a:latin typeface="Calibri"/>
               </a:rPr>
-              <a:t>Week 24: TQI rose sharply in one section, fastenings renewed</a:t>
+              <a:t>At the limit: an alarm, maintenance, and the defect resets</a:t>
             </a:r>
           </a:p>
         </p:txBody>
@@ -3991,7 +4514,7 @@
                 <a:ea typeface="Calibri" pitchFamily="34" charset="-122"/>
                 <a:cs typeface="Calibri" pitchFamily="34" charset="-120"/>
               </a:rPr>
-              <a:t>Simulated: 13 runs made from the one scan, with assumed defects that grow until an alarm orders maintenance. Alert limits are measured on runs without defects; alarm limits are assumed.</a:t>
+              <a:t>Simulated from the one real scan: the defects and the limits are assumed, not measured.</a:t>
             </a:r>
             <a:endParaRPr lang="en-US" sz="950" dirty="0"/>
           </a:p>
@@ -4005,8 +4528,8 @@
         </p:nvSpPr>
         <p:spPr>
           <a:xfrm>
-            <a:off x="457200" y="4297680"/>
-            <a:ext cx="8229600" cy="420624"/>
+            <a:off x="457200" y="4224528"/>
+            <a:ext cx="8229600" cy="438912"/>
           </a:xfrm>
           <a:prstGeom prst="roundRect">
             <a:avLst>
@@ -4039,8 +4562,8 @@
         </p:nvSpPr>
         <p:spPr>
           <a:xfrm>
-            <a:off x="731520" y="4297680"/>
-            <a:ext cx="7680960" cy="420624"/>
+            <a:off x="731520" y="4224528"/>
+            <a:ext cx="7680960" cy="438912"/>
           </a:xfrm>
           <a:prstGeom prst="rect">
             <a:avLst/>
@@ -4064,7 +4587,7 @@
                 <a:ea typeface="Calibri" pitchFamily="34" charset="-122"/>
                 <a:cs typeface="Calibri" pitchFamily="34" charset="-120"/>
               </a:rPr>
-              <a:t>The curve finds slow and local change; the TQI finds short-wave roughness. Neither finds both.</a:t>
+              <a:t>The method warns early and shows where, so maintenance can be planned instead of forced.</a:t>
             </a:r>
             <a:endParaRPr lang="en-US" sz="1200" dirty="0"/>
           </a:p>
@@ -4072,7 +4595,7 @@
       </p:sp>
       <p:pic>
         <p:nvPicPr>
-          <p:cNvPr id="11" name="Picture 10" descr="sim_slide.png"/>
+          <p:cNvPr id="11" name="Picture 10" descr="sim_slide_simple.png"/>
           <p:cNvPicPr>
             <a:picLocks noChangeAspect="1"/>
           </p:cNvPicPr>
@@ -4102,7 +4625,7 @@
 </p:sld>
 </file>
 
-<file path=ppt/slides/slide24.xml><?xml version="1.0" encoding="utf-8"?>
+<file path=ppt/slides/slide6.xml><?xml version="1.0" encoding="utf-8"?>
 <p:sld xmlns:a="http://schemas.openxmlformats.org/drawingml/2006/main" xmlns:r="http://schemas.openxmlformats.org/officeDocument/2006/relationships" xmlns:p="http://schemas.openxmlformats.org/presentationml/2006/main">
   <p:cSld>
     <p:spTree>
@@ -4152,7 +4675,7 @@
                 <a:ea typeface="Calibri" pitchFamily="34" charset="-122"/>
                 <a:cs typeface="Calibri" pitchFamily="34" charset="-120"/>
               </a:rPr>
-              <a:t>WHERE IT STANDS</a:t>
+              <a:t>WHERE WE ARE</a:t>
             </a:r>
             <a:endParaRPr lang="en-US" sz="1100" dirty="0"/>
           </a:p>
@@ -4191,7 +4714,772 @@
                 <a:ea typeface="Cambria" pitchFamily="34" charset="-122"/>
                 <a:cs typeface="Cambria" pitchFamily="34" charset="-120"/>
               </a:rPr>
-              <a:t>What is shown, and what comes next</a:t>
+              <a:t>Introduction done, method written</a:t>
+            </a:r>
+            <a:endParaRPr lang="en-US" sz="2700" dirty="0"/>
+          </a:p>
+        </p:txBody>
+      </p:sp>
+      <p:sp>
+        <p:nvSpPr>
+          <p:cNvPr id="10" name="Shape 16"/>
+          <p:cNvSpPr/>
+          <p:nvPr/>
+        </p:nvSpPr>
+        <p:spPr>
+          <a:xfrm>
+            <a:off x="457200" y="4114800"/>
+            <a:ext cx="8229600" cy="530352"/>
+          </a:xfrm>
+          <a:prstGeom prst="roundRect">
+            <a:avLst>
+              <a:gd name="adj" fmla="val 9091"/>
+            </a:avLst>
+          </a:prstGeom>
+          <a:solidFill>
+            <a:srgbClr val="0B2027"/>
+          </a:solidFill>
+          <a:ln w="12700">
+            <a:solidFill>
+              <a:srgbClr val="0B2027"/>
+            </a:solidFill>
+            <a:prstDash val="solid"/>
+          </a:ln>
+        </p:spPr>
+        <p:txBody>
+          <a:bodyPr/>
+          <a:lstStyle/>
+          <a:p>
+            <a:endParaRPr lang="sv-SE"/>
+          </a:p>
+        </p:txBody>
+      </p:sp>
+      <p:sp>
+        <p:nvSpPr>
+          <p:cNvPr id="11" name="Text 17"/>
+          <p:cNvSpPr txBox="1"/>
+          <p:nvPr/>
+        </p:nvSpPr>
+        <p:spPr>
+          <a:xfrm>
+            <a:off x="731520" y="4114800"/>
+            <a:ext cx="7680960" cy="530352"/>
+          </a:xfrm>
+          <a:prstGeom prst="rect">
+            <a:avLst/>
+          </a:prstGeom>
+          <a:noFill/>
+          <a:ln/>
+        </p:spPr>
+        <p:txBody>
+          <a:bodyPr wrap="square" lIns="0" tIns="0" rIns="0" bIns="0" rtlCol="0" anchor="ctr"/>
+          <a:lstStyle/>
+          <a:p>
+            <a:pPr marL="0" indent="0">
+              <a:buNone/>
+            </a:pPr>
+            <a:r>
+              <a:rPr lang="en-US" sz="1200" b="1" dirty="0">
+                <a:solidFill>
+                  <a:srgbClr val="FFFFFF"/>
+                </a:solidFill>
+                <a:latin typeface="Calibri" pitchFamily="34" charset="0"/>
+                <a:ea typeface="Calibri" pitchFamily="34" charset="-122"/>
+                <a:cs typeface="Calibri" pitchFamily="34" charset="-120"/>
+              </a:rPr>
+              <a:t>Next: write up the results, then the discussion.</a:t>
+            </a:r>
+            <a:endParaRPr lang="en-US" sz="1200" dirty="0"/>
+          </a:p>
+        </p:txBody>
+      </p:sp>
+      <p:sp>
+        <p:nvSpPr>
+          <p:cNvPr id="12" name="Shape 2"/>
+          <p:cNvSpPr/>
+          <p:nvPr/>
+        </p:nvSpPr>
+        <p:spPr>
+          <a:xfrm>
+            <a:off x="457200" y="1371600"/>
+            <a:ext cx="384048" cy="384048"/>
+          </a:xfrm>
+          <a:prstGeom prst="ellipse">
+            <a:avLst/>
+          </a:prstGeom>
+          <a:solidFill>
+            <a:srgbClr val="028090"/>
+          </a:solidFill>
+          <a:ln w="12700">
+            <a:solidFill>
+              <a:srgbClr val="028090"/>
+            </a:solidFill>
+            <a:prstDash val="solid"/>
+          </a:ln>
+        </p:spPr>
+        <p:txBody>
+          <a:bodyPr/>
+          <a:lstStyle/>
+          <a:p>
+            <a:endParaRPr lang="sv-SE"/>
+          </a:p>
+        </p:txBody>
+      </p:sp>
+      <p:sp>
+        <p:nvSpPr>
+          <p:cNvPr id="13" name="Text 3"/>
+          <p:cNvSpPr txBox="1"/>
+          <p:nvPr/>
+        </p:nvSpPr>
+        <p:spPr>
+          <a:xfrm>
+            <a:off x="457200" y="1371600"/>
+            <a:ext cx="384048" cy="384048"/>
+          </a:xfrm>
+          <a:prstGeom prst="rect">
+            <a:avLst/>
+          </a:prstGeom>
+          <a:noFill/>
+          <a:ln/>
+        </p:spPr>
+        <p:txBody>
+          <a:bodyPr wrap="square" lIns="0" tIns="0" rIns="0" bIns="0" rtlCol="0" anchor="ctr"/>
+          <a:lstStyle/>
+          <a:p>
+            <a:pPr marL="0" indent="0" algn="ctr">
+              <a:buNone/>
+            </a:pPr>
+            <a:r>
+              <a:rPr lang="en-US" sz="1400" b="1" dirty="0">
+                <a:solidFill>
+                  <a:srgbClr val="FFFFFF"/>
+                </a:solidFill>
+                <a:latin typeface="Calibri" pitchFamily="34" charset="0"/>
+                <a:ea typeface="Calibri" pitchFamily="34" charset="-122"/>
+                <a:cs typeface="Calibri" pitchFamily="34" charset="-120"/>
+              </a:rPr>
+              <a:t>✓</a:t>
+            </a:r>
+            <a:endParaRPr lang="en-US" sz="1400" dirty="0"/>
+          </a:p>
+        </p:txBody>
+      </p:sp>
+      <p:sp>
+        <p:nvSpPr>
+          <p:cNvPr id="14" name="Text 4"/>
+          <p:cNvSpPr txBox="1"/>
+          <p:nvPr/>
+        </p:nvSpPr>
+        <p:spPr>
+          <a:xfrm>
+            <a:off x="1005840" y="1389888"/>
+            <a:ext cx="2743200" cy="274320"/>
+          </a:xfrm>
+          <a:prstGeom prst="rect">
+            <a:avLst/>
+          </a:prstGeom>
+          <a:noFill/>
+          <a:ln/>
+        </p:spPr>
+        <p:txBody>
+          <a:bodyPr wrap="square" lIns="0" tIns="0" rIns="0" bIns="0" rtlCol="0" anchor="ctr"/>
+          <a:lstStyle/>
+          <a:p>
+            <a:pPr marL="0" indent="0">
+              <a:buNone/>
+            </a:pPr>
+            <a:r>
+              <a:rPr lang="en-US" sz="1400" b="1" dirty="0">
+                <a:solidFill>
+                  <a:srgbClr val="16262B"/>
+                </a:solidFill>
+                <a:latin typeface="Calibri" pitchFamily="34" charset="0"/>
+                <a:ea typeface="Calibri" pitchFamily="34" charset="-122"/>
+                <a:cs typeface="Calibri" pitchFamily="34" charset="-120"/>
+              </a:rPr>
+              <a:t>Introduction</a:t>
+            </a:r>
+            <a:endParaRPr lang="en-US" sz="1400" dirty="0"/>
+          </a:p>
+        </p:txBody>
+      </p:sp>
+      <p:sp>
+        <p:nvSpPr>
+          <p:cNvPr id="15" name="Text 5"/>
+          <p:cNvSpPr txBox="1"/>
+          <p:nvPr/>
+        </p:nvSpPr>
+        <p:spPr>
+          <a:xfrm>
+            <a:off x="3886200" y="1353312"/>
+            <a:ext cx="4800600" cy="420624"/>
+          </a:xfrm>
+          <a:prstGeom prst="rect">
+            <a:avLst/>
+          </a:prstGeom>
+          <a:noFill/>
+          <a:ln/>
+        </p:spPr>
+        <p:txBody>
+          <a:bodyPr wrap="square" lIns="0" tIns="0" rIns="0" bIns="0" rtlCol="0" anchor="ctr"/>
+          <a:lstStyle/>
+          <a:p>
+            <a:pPr marL="0" indent="0">
+              <a:buNone/>
+            </a:pPr>
+            <a:r>
+              <a:rPr lang="en-US" sz="1100" dirty="0">
+                <a:solidFill>
+                  <a:srgbClr val="5F7178"/>
+                </a:solidFill>
+                <a:latin typeface="Calibri" pitchFamily="34" charset="0"/>
+                <a:ea typeface="Calibri" pitchFamily="34" charset="-122"/>
+                <a:cs typeface="Calibri" pitchFamily="34" charset="-120"/>
+              </a:rPr>
+              <a:t>done: the background, the idea and the research questions</a:t>
+            </a:r>
+            <a:endParaRPr lang="en-US" sz="1100" dirty="0"/>
+          </a:p>
+        </p:txBody>
+      </p:sp>
+      <p:sp>
+        <p:nvSpPr>
+          <p:cNvPr id="16" name="Shape 2"/>
+          <p:cNvSpPr/>
+          <p:nvPr/>
+        </p:nvSpPr>
+        <p:spPr>
+          <a:xfrm>
+            <a:off x="457200" y="2029967"/>
+            <a:ext cx="384048" cy="384048"/>
+          </a:xfrm>
+          <a:prstGeom prst="ellipse">
+            <a:avLst/>
+          </a:prstGeom>
+          <a:solidFill>
+            <a:srgbClr val="028090"/>
+          </a:solidFill>
+          <a:ln w="12700">
+            <a:solidFill>
+              <a:srgbClr val="028090"/>
+            </a:solidFill>
+            <a:prstDash val="solid"/>
+          </a:ln>
+        </p:spPr>
+        <p:txBody>
+          <a:bodyPr/>
+          <a:lstStyle/>
+          <a:p>
+            <a:endParaRPr lang="sv-SE"/>
+          </a:p>
+        </p:txBody>
+      </p:sp>
+      <p:sp>
+        <p:nvSpPr>
+          <p:cNvPr id="17" name="Text 3"/>
+          <p:cNvSpPr txBox="1"/>
+          <p:nvPr/>
+        </p:nvSpPr>
+        <p:spPr>
+          <a:xfrm>
+            <a:off x="457200" y="2029967"/>
+            <a:ext cx="384048" cy="384048"/>
+          </a:xfrm>
+          <a:prstGeom prst="rect">
+            <a:avLst/>
+          </a:prstGeom>
+          <a:noFill/>
+          <a:ln/>
+        </p:spPr>
+        <p:txBody>
+          <a:bodyPr wrap="square" lIns="0" tIns="0" rIns="0" bIns="0" rtlCol="0" anchor="ctr"/>
+          <a:lstStyle/>
+          <a:p>
+            <a:pPr marL="0" indent="0" algn="ctr">
+              <a:buNone/>
+            </a:pPr>
+            <a:r>
+              <a:rPr lang="en-US" sz="1400" b="1" dirty="0">
+                <a:solidFill>
+                  <a:srgbClr val="FFFFFF"/>
+                </a:solidFill>
+                <a:latin typeface="Calibri" pitchFamily="34" charset="0"/>
+                <a:ea typeface="Calibri" pitchFamily="34" charset="-122"/>
+                <a:cs typeface="Calibri" pitchFamily="34" charset="-120"/>
+              </a:rPr>
+              <a:t>✓</a:t>
+            </a:r>
+            <a:endParaRPr lang="en-US" sz="1400" dirty="0"/>
+          </a:p>
+        </p:txBody>
+      </p:sp>
+      <p:sp>
+        <p:nvSpPr>
+          <p:cNvPr id="18" name="Text 4"/>
+          <p:cNvSpPr txBox="1"/>
+          <p:nvPr/>
+        </p:nvSpPr>
+        <p:spPr>
+          <a:xfrm>
+            <a:off x="1005840" y="2048255"/>
+            <a:ext cx="2743200" cy="274320"/>
+          </a:xfrm>
+          <a:prstGeom prst="rect">
+            <a:avLst/>
+          </a:prstGeom>
+          <a:noFill/>
+          <a:ln/>
+        </p:spPr>
+        <p:txBody>
+          <a:bodyPr wrap="square" lIns="0" tIns="0" rIns="0" bIns="0" rtlCol="0" anchor="ctr"/>
+          <a:lstStyle/>
+          <a:p>
+            <a:pPr marL="0" indent="0">
+              <a:buNone/>
+            </a:pPr>
+            <a:r>
+              <a:rPr lang="en-US" sz="1400" b="1" dirty="0">
+                <a:solidFill>
+                  <a:srgbClr val="16262B"/>
+                </a:solidFill>
+                <a:latin typeface="Calibri" pitchFamily="34" charset="0"/>
+                <a:ea typeface="Calibri" pitchFamily="34" charset="-122"/>
+                <a:cs typeface="Calibri" pitchFamily="34" charset="-120"/>
+              </a:rPr>
+              <a:t>Method</a:t>
+            </a:r>
+            <a:endParaRPr lang="en-US" sz="1400" dirty="0"/>
+          </a:p>
+        </p:txBody>
+      </p:sp>
+      <p:sp>
+        <p:nvSpPr>
+          <p:cNvPr id="19" name="Text 5"/>
+          <p:cNvSpPr txBox="1"/>
+          <p:nvPr/>
+        </p:nvSpPr>
+        <p:spPr>
+          <a:xfrm>
+            <a:off x="3886200" y="2011679"/>
+            <a:ext cx="4800600" cy="420624"/>
+          </a:xfrm>
+          <a:prstGeom prst="rect">
+            <a:avLst/>
+          </a:prstGeom>
+          <a:noFill/>
+          <a:ln/>
+        </p:spPr>
+        <p:txBody>
+          <a:bodyPr wrap="square" lIns="0" tIns="0" rIns="0" bIns="0" rtlCol="0" anchor="ctr"/>
+          <a:lstStyle/>
+          <a:p>
+            <a:pPr marL="0" indent="0">
+              <a:buNone/>
+            </a:pPr>
+            <a:r>
+              <a:rPr lang="en-US" sz="1100" dirty="0">
+                <a:solidFill>
+                  <a:srgbClr val="5F7178"/>
+                </a:solidFill>
+                <a:latin typeface="Calibri" pitchFamily="34" charset="0"/>
+                <a:ea typeface="Calibri" pitchFamily="34" charset="-122"/>
+                <a:cs typeface="Calibri" pitchFamily="34" charset="-120"/>
+              </a:rPr>
+              <a:t>written: the pipeline, the test plan and the simulation</a:t>
+            </a:r>
+            <a:endParaRPr lang="en-US" sz="1100" dirty="0"/>
+          </a:p>
+        </p:txBody>
+      </p:sp>
+      <p:sp>
+        <p:nvSpPr>
+          <p:cNvPr id="20" name="Shape 2"/>
+          <p:cNvSpPr/>
+          <p:nvPr/>
+        </p:nvSpPr>
+        <p:spPr>
+          <a:xfrm>
+            <a:off x="457200" y="2688336"/>
+            <a:ext cx="384048" cy="384048"/>
+          </a:xfrm>
+          <a:prstGeom prst="ellipse">
+            <a:avLst/>
+          </a:prstGeom>
+          <a:solidFill>
+            <a:srgbClr val="DCE7E8"/>
+          </a:solidFill>
+          <a:ln w="12700">
+            <a:solidFill>
+              <a:srgbClr val="028090"/>
+            </a:solidFill>
+            <a:prstDash val="solid"/>
+          </a:ln>
+        </p:spPr>
+        <p:txBody>
+          <a:bodyPr/>
+          <a:lstStyle/>
+          <a:p>
+            <a:endParaRPr lang="sv-SE"/>
+          </a:p>
+        </p:txBody>
+      </p:sp>
+      <p:sp>
+        <p:nvSpPr>
+          <p:cNvPr id="21" name="Text 3"/>
+          <p:cNvSpPr txBox="1"/>
+          <p:nvPr/>
+        </p:nvSpPr>
+        <p:spPr>
+          <a:xfrm>
+            <a:off x="457200" y="2688336"/>
+            <a:ext cx="384048" cy="384048"/>
+          </a:xfrm>
+          <a:prstGeom prst="rect">
+            <a:avLst/>
+          </a:prstGeom>
+          <a:noFill/>
+          <a:ln/>
+        </p:spPr>
+        <p:txBody>
+          <a:bodyPr wrap="square" lIns="0" tIns="0" rIns="0" bIns="0" rtlCol="0" anchor="ctr"/>
+          <a:lstStyle/>
+          <a:p>
+            <a:pPr marL="0" indent="0" algn="ctr">
+              <a:buNone/>
+            </a:pPr>
+            <a:r>
+              <a:rPr lang="en-US" sz="1400" b="1" dirty="0">
+                <a:solidFill>
+                  <a:srgbClr val="5F7178"/>
+                </a:solidFill>
+                <a:latin typeface="Calibri" pitchFamily="34" charset="0"/>
+                <a:ea typeface="Calibri" pitchFamily="34" charset="-122"/>
+                <a:cs typeface="Calibri" pitchFamily="34" charset="-120"/>
+              </a:rPr>
+              <a:t>3</a:t>
+            </a:r>
+            <a:endParaRPr lang="en-US" sz="1400" dirty="0"/>
+          </a:p>
+        </p:txBody>
+      </p:sp>
+      <p:sp>
+        <p:nvSpPr>
+          <p:cNvPr id="22" name="Text 4"/>
+          <p:cNvSpPr txBox="1"/>
+          <p:nvPr/>
+        </p:nvSpPr>
+        <p:spPr>
+          <a:xfrm>
+            <a:off x="1005840" y="2706624"/>
+            <a:ext cx="2743200" cy="274320"/>
+          </a:xfrm>
+          <a:prstGeom prst="rect">
+            <a:avLst/>
+          </a:prstGeom>
+          <a:noFill/>
+          <a:ln/>
+        </p:spPr>
+        <p:txBody>
+          <a:bodyPr wrap="square" lIns="0" tIns="0" rIns="0" bIns="0" rtlCol="0" anchor="ctr"/>
+          <a:lstStyle/>
+          <a:p>
+            <a:pPr marL="0" indent="0">
+              <a:buNone/>
+            </a:pPr>
+            <a:r>
+              <a:rPr lang="en-US" sz="1400" b="1" dirty="0">
+                <a:solidFill>
+                  <a:srgbClr val="16262B"/>
+                </a:solidFill>
+                <a:latin typeface="Calibri" pitchFamily="34" charset="0"/>
+                <a:ea typeface="Calibri" pitchFamily="34" charset="-122"/>
+                <a:cs typeface="Calibri" pitchFamily="34" charset="-120"/>
+              </a:rPr>
+              <a:t>Results</a:t>
+            </a:r>
+            <a:endParaRPr lang="en-US" sz="1400" dirty="0"/>
+          </a:p>
+        </p:txBody>
+      </p:sp>
+      <p:sp>
+        <p:nvSpPr>
+          <p:cNvPr id="23" name="Text 5"/>
+          <p:cNvSpPr txBox="1"/>
+          <p:nvPr/>
+        </p:nvSpPr>
+        <p:spPr>
+          <a:xfrm>
+            <a:off x="3886200" y="2670048"/>
+            <a:ext cx="4800600" cy="420624"/>
+          </a:xfrm>
+          <a:prstGeom prst="rect">
+            <a:avLst/>
+          </a:prstGeom>
+          <a:noFill/>
+          <a:ln/>
+        </p:spPr>
+        <p:txBody>
+          <a:bodyPr wrap="square" lIns="0" tIns="0" rIns="0" bIns="0" rtlCol="0" anchor="ctr"/>
+          <a:lstStyle/>
+          <a:p>
+            <a:pPr marL="0" indent="0">
+              <a:buNone/>
+            </a:pPr>
+            <a:r>
+              <a:rPr lang="en-US" sz="1100" dirty="0">
+                <a:solidFill>
+                  <a:srgbClr val="5F7178"/>
+                </a:solidFill>
+                <a:latin typeface="Calibri" pitchFamily="34" charset="0"/>
+                <a:ea typeface="Calibri" pitchFamily="34" charset="-122"/>
+                <a:cs typeface="Calibri" pitchFamily="34" charset="-120"/>
+              </a:rPr>
+              <a:t>next: the test on the real scan and the simulation</a:t>
+            </a:r>
+            <a:endParaRPr lang="en-US" sz="1100" dirty="0"/>
+          </a:p>
+        </p:txBody>
+      </p:sp>
+      <p:sp>
+        <p:nvSpPr>
+          <p:cNvPr id="24" name="Shape 2"/>
+          <p:cNvSpPr/>
+          <p:nvPr/>
+        </p:nvSpPr>
+        <p:spPr>
+          <a:xfrm>
+            <a:off x="457200" y="3346704"/>
+            <a:ext cx="384048" cy="384048"/>
+          </a:xfrm>
+          <a:prstGeom prst="ellipse">
+            <a:avLst/>
+          </a:prstGeom>
+          <a:solidFill>
+            <a:srgbClr val="DCE7E8"/>
+          </a:solidFill>
+          <a:ln w="12700">
+            <a:solidFill>
+              <a:srgbClr val="028090"/>
+            </a:solidFill>
+            <a:prstDash val="solid"/>
+          </a:ln>
+        </p:spPr>
+        <p:txBody>
+          <a:bodyPr/>
+          <a:lstStyle/>
+          <a:p>
+            <a:endParaRPr lang="sv-SE"/>
+          </a:p>
+        </p:txBody>
+      </p:sp>
+      <p:sp>
+        <p:nvSpPr>
+          <p:cNvPr id="25" name="Text 3"/>
+          <p:cNvSpPr txBox="1"/>
+          <p:nvPr/>
+        </p:nvSpPr>
+        <p:spPr>
+          <a:xfrm>
+            <a:off x="457200" y="3346704"/>
+            <a:ext cx="384048" cy="384048"/>
+          </a:xfrm>
+          <a:prstGeom prst="rect">
+            <a:avLst/>
+          </a:prstGeom>
+          <a:noFill/>
+          <a:ln/>
+        </p:spPr>
+        <p:txBody>
+          <a:bodyPr wrap="square" lIns="0" tIns="0" rIns="0" bIns="0" rtlCol="0" anchor="ctr"/>
+          <a:lstStyle/>
+          <a:p>
+            <a:pPr marL="0" indent="0" algn="ctr">
+              <a:buNone/>
+            </a:pPr>
+            <a:r>
+              <a:rPr lang="en-US" sz="1400" b="1" dirty="0">
+                <a:solidFill>
+                  <a:srgbClr val="5F7178"/>
+                </a:solidFill>
+                <a:latin typeface="Calibri" pitchFamily="34" charset="0"/>
+                <a:ea typeface="Calibri" pitchFamily="34" charset="-122"/>
+                <a:cs typeface="Calibri" pitchFamily="34" charset="-120"/>
+              </a:rPr>
+              <a:t>4</a:t>
+            </a:r>
+            <a:endParaRPr lang="en-US" sz="1400" dirty="0"/>
+          </a:p>
+        </p:txBody>
+      </p:sp>
+      <p:sp>
+        <p:nvSpPr>
+          <p:cNvPr id="26" name="Text 4"/>
+          <p:cNvSpPr txBox="1"/>
+          <p:nvPr/>
+        </p:nvSpPr>
+        <p:spPr>
+          <a:xfrm>
+            <a:off x="1005840" y="3364992"/>
+            <a:ext cx="2743200" cy="274320"/>
+          </a:xfrm>
+          <a:prstGeom prst="rect">
+            <a:avLst/>
+          </a:prstGeom>
+          <a:noFill/>
+          <a:ln/>
+        </p:spPr>
+        <p:txBody>
+          <a:bodyPr wrap="square" lIns="0" tIns="0" rIns="0" bIns="0" rtlCol="0" anchor="ctr"/>
+          <a:lstStyle/>
+          <a:p>
+            <a:pPr marL="0" indent="0">
+              <a:buNone/>
+            </a:pPr>
+            <a:r>
+              <a:rPr lang="en-US" sz="1400" b="1" dirty="0">
+                <a:solidFill>
+                  <a:srgbClr val="16262B"/>
+                </a:solidFill>
+                <a:latin typeface="Calibri" pitchFamily="34" charset="0"/>
+                <a:ea typeface="Calibri" pitchFamily="34" charset="-122"/>
+                <a:cs typeface="Calibri" pitchFamily="34" charset="-120"/>
+              </a:rPr>
+              <a:t>Discussion and conclusion</a:t>
+            </a:r>
+            <a:endParaRPr lang="en-US" sz="1400" dirty="0"/>
+          </a:p>
+        </p:txBody>
+      </p:sp>
+      <p:sp>
+        <p:nvSpPr>
+          <p:cNvPr id="27" name="Text 5"/>
+          <p:cNvSpPr txBox="1"/>
+          <p:nvPr/>
+        </p:nvSpPr>
+        <p:spPr>
+          <a:xfrm>
+            <a:off x="3886200" y="3328416"/>
+            <a:ext cx="4800600" cy="420624"/>
+          </a:xfrm>
+          <a:prstGeom prst="rect">
+            <a:avLst/>
+          </a:prstGeom>
+          <a:noFill/>
+          <a:ln/>
+        </p:spPr>
+        <p:txBody>
+          <a:bodyPr wrap="square" lIns="0" tIns="0" rIns="0" bIns="0" rtlCol="0" anchor="ctr"/>
+          <a:lstStyle/>
+          <a:p>
+            <a:pPr marL="0" indent="0">
+              <a:buNone/>
+            </a:pPr>
+            <a:r>
+              <a:rPr lang="en-US" sz="1100" dirty="0">
+                <a:solidFill>
+                  <a:srgbClr val="5F7178"/>
+                </a:solidFill>
+                <a:latin typeface="Calibri" pitchFamily="34" charset="0"/>
+                <a:ea typeface="Calibri" pitchFamily="34" charset="-122"/>
+                <a:cs typeface="Calibri" pitchFamily="34" charset="-120"/>
+              </a:rPr>
+              <a:t>later: what the method can and cannot show</a:t>
+            </a:r>
+            <a:endParaRPr lang="en-US" sz="1100" dirty="0"/>
+          </a:p>
+        </p:txBody>
+      </p:sp>
+    </p:spTree>
+  </p:cSld>
+  <p:clrMapOvr>
+    <a:masterClrMapping/>
+  </p:clrMapOvr>
+</p:sld>
+</file>
+
+<file path=ppt/slides/slide7.xml><?xml version="1.0" encoding="utf-8"?>
+<p:sld xmlns:a="http://schemas.openxmlformats.org/drawingml/2006/main" xmlns:p="http://schemas.openxmlformats.org/presentationml/2006/main" xmlns:r="http://schemas.openxmlformats.org/officeDocument/2006/relationships">
+  <p:cSld>
+    <p:spTree>
+      <p:nvGrpSpPr>
+        <p:cNvPr id="1" name=""/>
+        <p:cNvGrpSpPr/>
+        <p:nvPr/>
+      </p:nvGrpSpPr>
+      <p:grpSpPr/>
+      <p:sp>
+        <p:nvSpPr>
+          <p:cNvPr id="2" name="Text 0"/>
+          <p:cNvSpPr txBox="1"/>
+          <p:nvPr/>
+        </p:nvSpPr>
+        <p:spPr>
+          <a:xfrm>
+            <a:off x="457200" y="274320"/>
+            <a:ext cx="8229600" cy="228600"/>
+          </a:xfrm>
+          <a:prstGeom prst="rect">
+            <a:avLst/>
+          </a:prstGeom>
+          <a:noFill/>
+          <a:ln/>
+        </p:spPr>
+        <p:txBody>
+          <a:bodyPr wrap="square" lIns="0" tIns="0" rIns="0" bIns="0" rtlCol="0" anchor="ctr"/>
+          <a:lstStyle/>
+          <a:p>
+            <a:pPr marL="0" indent="0">
+              <a:buNone/>
+            </a:pPr>
+            <a:r>
+              <a:rPr lang="en-US" sz="1100" b="1" kern="0" spc="200" dirty="0">
+                <a:solidFill>
+                  <a:srgbClr val="028090"/>
+                </a:solidFill>
+                <a:latin typeface="Calibri" pitchFamily="34" charset="0"/>
+                <a:ea typeface="Calibri" pitchFamily="34" charset="-122"/>
+                <a:cs typeface="Calibri" pitchFamily="34" charset="-120"/>
+              </a:rPr>
+              <a:t>THE IDEA</a:t>
+            </a:r>
+            <a:endParaRPr lang="en-US" sz="1100" dirty="0"/>
+          </a:p>
+        </p:txBody>
+      </p:sp>
+      <p:sp>
+        <p:nvSpPr>
+          <p:cNvPr id="3" name="Text 1"/>
+          <p:cNvSpPr txBox="1"/>
+          <p:nvPr/>
+        </p:nvSpPr>
+        <p:spPr>
+          <a:xfrm>
+            <a:off x="457200" y="502920"/>
+            <a:ext cx="8229600" cy="548640"/>
+          </a:xfrm>
+          <a:prstGeom prst="rect">
+            <a:avLst/>
+          </a:prstGeom>
+          <a:noFill/>
+          <a:ln/>
+        </p:spPr>
+        <p:txBody>
+          <a:bodyPr wrap="square" lIns="0" tIns="0" rIns="0" bIns="0" rtlCol="0" anchor="ctr"/>
+          <a:lstStyle/>
+          <a:p>
+            <a:pPr marL="0" indent="0">
+              <a:buNone/>
+            </a:pPr>
+            <a:r>
+              <a:rPr lang="en-US" sz="2700" b="1" dirty="0">
+                <a:solidFill>
+                  <a:srgbClr val="16262B"/>
+                </a:solidFill>
+                <a:latin typeface="Cambria" pitchFamily="34" charset="0"/>
+                <a:ea typeface="Cambria" pitchFamily="34" charset="-122"/>
+                <a:cs typeface="Cambria" pitchFamily="34" charset="-120"/>
+              </a:rPr>
+              <a:t>An index says how rough, a curve says where</a:t>
             </a:r>
             <a:endParaRPr lang="en-US" sz="2700" dirty="0"/>
           </a:p>
@@ -4205,8 +5493,8 @@
         </p:nvSpPr>
         <p:spPr>
           <a:xfrm>
-            <a:off x="457200" y="1325880"/>
-            <a:ext cx="4023360" cy="2514600"/>
+            <a:off x="457200" y="1234440"/>
+            <a:ext cx="3611880" cy="1234440"/>
           </a:xfrm>
           <a:prstGeom prst="roundRect">
             <a:avLst>
@@ -4239,8 +5527,8 @@
         </p:nvSpPr>
         <p:spPr>
           <a:xfrm>
-            <a:off x="685800" y="1508760"/>
-            <a:ext cx="3566160" cy="228600"/>
+            <a:off x="685800" y="1353312"/>
+            <a:ext cx="3200400" cy="228600"/>
           </a:xfrm>
           <a:prstGeom prst="rect">
             <a:avLst/>
@@ -4256,11 +5544,11 @@
             <a:r>
               <a:rPr sz="1100" b="1" spc="200">
                 <a:solidFill>
-                  <a:srgbClr val="028090"/>
+                  <a:srgbClr val="5F7178"/>
                 </a:solidFill>
                 <a:latin typeface="Calibri"/>
               </a:rPr>
-              <a:t>SHOWN</a:t>
+              <a:t>TODAY: AN INDEX</a:t>
             </a:r>
           </a:p>
         </p:txBody>
@@ -4273,8 +5561,8 @@
         </p:nvSpPr>
         <p:spPr>
           <a:xfrm>
-            <a:off x="685800" y="1874519"/>
-            <a:ext cx="3611880" cy="1920240"/>
+            <a:off x="685800" y="1591056"/>
+            <a:ext cx="3200400" cy="274320"/>
           </a:xfrm>
           <a:prstGeom prst="rect">
             <a:avLst/>
@@ -4287,68 +5575,242 @@
           </a:bodyPr>
           <a:lstStyle/>
           <a:p>
-            <a:pPr marL="171450" indent="-171450">
-              <a:spcAft>
-                <a:spcPts val="700"/>
-              </a:spcAft>
-              <a:buChar char="•"/>
-            </a:pPr>
-            <a:r>
-              <a:rPr sz="1200" b="0">
-                <a:solidFill>
-                  <a:srgbClr val="16262B"/>
+            <a:r>
+              <a:rPr sz="1500" b="1">
+                <a:solidFill>
+                  <a:srgbClr val="5F7178"/>
                 </a:solidFill>
                 <a:latin typeface="Calibri"/>
               </a:rPr>
-              <a:t>A repeatable pipeline from a LiDAR run to a 3D rail curve</a:t>
-            </a:r>
-          </a:p>
-          <a:p>
-            <a:pPr marL="171450" indent="-171450">
-              <a:spcAft>
-                <a:spcPts val="700"/>
-              </a:spcAft>
-              <a:buChar char="•"/>
-            </a:pPr>
-            <a:r>
-              <a:rPr sz="1200" b="0">
-                <a:solidFill>
-                  <a:srgbClr val="16262B"/>
+              <a:t>One number per section</a:t>
+            </a:r>
+          </a:p>
+        </p:txBody>
+      </p:sp>
+      <p:sp>
+        <p:nvSpPr>
+          <p:cNvPr id="7" name="TextBox 6"/>
+          <p:cNvSpPr txBox="1"/>
+          <p:nvPr/>
+        </p:nvSpPr>
+        <p:spPr>
+          <a:xfrm>
+            <a:off x="685800" y="1901952"/>
+            <a:ext cx="3200400" cy="475488"/>
+          </a:xfrm>
+          <a:prstGeom prst="rect">
+            <a:avLst/>
+          </a:prstGeom>
+          <a:noFill/>
+        </p:spPr>
+        <p:txBody>
+          <a:bodyPr wrap="square" lIns="0" tIns="0" rIns="0" bIns="0" anchor="t">
+            <a:spAutoFit/>
+          </a:bodyPr>
+          <a:lstStyle/>
+          <a:p>
+            <a:r>
+              <a:rPr sz="1150" b="0">
+                <a:solidFill>
+                  <a:srgbClr val="5F7178"/>
                 </a:solidFill>
                 <a:latin typeface="Calibri"/>
               </a:rPr>
-              <a:t>Gauge and alignment with a measured noise floor of about 1 mm</a:t>
-            </a:r>
-          </a:p>
-          <a:p>
-            <a:pPr marL="171450" indent="-171450">
-              <a:spcAft>
-                <a:spcPts val="700"/>
-              </a:spcAft>
-              <a:buChar char="•"/>
-            </a:pPr>
-            <a:r>
-              <a:rPr sz="1200" b="0">
-                <a:solidFill>
-                  <a:srgbClr val="16262B"/>
+              <a:t>The Track Quality Index says how rough a section is. Where a change sits, and how big it is, is averaged away.</a:t>
+            </a:r>
+          </a:p>
+        </p:txBody>
+      </p:sp>
+      <p:sp>
+        <p:nvSpPr>
+          <p:cNvPr id="8" name="Right Arrow 7"/>
+          <p:cNvSpPr/>
+          <p:nvPr/>
+        </p:nvSpPr>
+        <p:spPr>
+          <a:xfrm>
+            <a:off x="4206240" y="1627632"/>
+            <a:ext cx="731520" cy="457200"/>
+          </a:xfrm>
+          <a:prstGeom prst="rightArrow">
+            <a:avLst/>
+          </a:prstGeom>
+          <a:solidFill>
+            <a:srgbClr val="028090"/>
+          </a:solidFill>
+          <a:ln>
+            <a:noFill/>
+          </a:ln>
+        </p:spPr>
+        <p:style>
+          <a:lnRef idx="1">
+            <a:schemeClr val="accent1"/>
+          </a:lnRef>
+          <a:fillRef idx="3">
+            <a:schemeClr val="accent1"/>
+          </a:fillRef>
+          <a:effectRef idx="2">
+            <a:schemeClr val="accent1"/>
+          </a:effectRef>
+          <a:fontRef idx="minor">
+            <a:schemeClr val="lt1"/>
+          </a:fontRef>
+        </p:style>
+        <p:txBody>
+          <a:bodyPr rtlCol="0" anchor="ctr"/>
+          <a:lstStyle/>
+          <a:p>
+            <a:pPr algn="ctr"/>
+            <a:endParaRPr/>
+          </a:p>
+        </p:txBody>
+      </p:sp>
+      <p:sp>
+        <p:nvSpPr>
+          <p:cNvPr id="9" name="Shape 16"/>
+          <p:cNvSpPr/>
+          <p:nvPr/>
+        </p:nvSpPr>
+        <p:spPr>
+          <a:xfrm>
+            <a:off x="5074920" y="1234440"/>
+            <a:ext cx="3611880" cy="1234440"/>
+          </a:xfrm>
+          <a:prstGeom prst="roundRect">
+            <a:avLst>
+              <a:gd name="adj" fmla="val 9091"/>
+            </a:avLst>
+          </a:prstGeom>
+          <a:solidFill>
+            <a:srgbClr val="0B2027"/>
+          </a:solidFill>
+          <a:ln w="12700">
+            <a:solidFill>
+              <a:srgbClr val="0B2027"/>
+            </a:solidFill>
+            <a:prstDash val="solid"/>
+          </a:ln>
+        </p:spPr>
+        <p:txBody>
+          <a:bodyPr/>
+          <a:lstStyle/>
+          <a:p>
+            <a:endParaRPr lang="sv-SE"/>
+          </a:p>
+        </p:txBody>
+      </p:sp>
+      <p:sp>
+        <p:nvSpPr>
+          <p:cNvPr id="10" name="TextBox 9"/>
+          <p:cNvSpPr txBox="1"/>
+          <p:nvPr/>
+        </p:nvSpPr>
+        <p:spPr>
+          <a:xfrm>
+            <a:off x="5303520" y="1353312"/>
+            <a:ext cx="3200400" cy="228600"/>
+          </a:xfrm>
+          <a:prstGeom prst="rect">
+            <a:avLst/>
+          </a:prstGeom>
+          <a:noFill/>
+        </p:spPr>
+        <p:txBody>
+          <a:bodyPr wrap="square" lIns="0" tIns="0" rIns="0" bIns="0" anchor="t">
+            <a:spAutoFit/>
+          </a:bodyPr>
+          <a:lstStyle/>
+          <a:p>
+            <a:r>
+              <a:rPr sz="1100" b="1" spc="200">
+                <a:solidFill>
+                  <a:srgbClr val="00A896"/>
                 </a:solidFill>
                 <a:latin typeface="Calibri"/>
               </a:rPr>
-              <a:t>In simulation, alerts come weeks before alarms and at the right place</a:t>
-            </a:r>
-          </a:p>
-        </p:txBody>
-      </p:sp>
-      <p:sp>
-        <p:nvSpPr>
-          <p:cNvPr id="7" name="Shape 4"/>
+              <a:t>THIS PROJECT: A CURVE</a:t>
+            </a:r>
+          </a:p>
+        </p:txBody>
+      </p:sp>
+      <p:sp>
+        <p:nvSpPr>
+          <p:cNvPr id="11" name="TextBox 10"/>
+          <p:cNvSpPr txBox="1"/>
+          <p:nvPr/>
+        </p:nvSpPr>
+        <p:spPr>
+          <a:xfrm>
+            <a:off x="5303520" y="1591056"/>
+            <a:ext cx="3200400" cy="274320"/>
+          </a:xfrm>
+          <a:prstGeom prst="rect">
+            <a:avLst/>
+          </a:prstGeom>
+          <a:noFill/>
+        </p:spPr>
+        <p:txBody>
+          <a:bodyPr wrap="square" lIns="0" tIns="0" rIns="0" bIns="0" anchor="t">
+            <a:spAutoFit/>
+          </a:bodyPr>
+          <a:lstStyle/>
+          <a:p>
+            <a:r>
+              <a:rPr sz="1500" b="1">
+                <a:solidFill>
+                  <a:srgbClr val="FFFFFF"/>
+                </a:solidFill>
+                <a:latin typeface="Calibri"/>
+              </a:rPr>
+              <a:t>Both rails as a curve in a fixed frame</a:t>
+            </a:r>
+          </a:p>
+        </p:txBody>
+      </p:sp>
+      <p:sp>
+        <p:nvSpPr>
+          <p:cNvPr id="12" name="TextBox 11"/>
+          <p:cNvSpPr txBox="1"/>
+          <p:nvPr/>
+        </p:nvSpPr>
+        <p:spPr>
+          <a:xfrm>
+            <a:off x="5303520" y="1901952"/>
+            <a:ext cx="3200400" cy="475488"/>
+          </a:xfrm>
+          <a:prstGeom prst="rect">
+            <a:avLst/>
+          </a:prstGeom>
+          <a:noFill/>
+        </p:spPr>
+        <p:txBody>
+          <a:bodyPr wrap="square" lIns="0" tIns="0" rIns="0" bIns="0" anchor="t">
+            <a:spAutoFit/>
+          </a:bodyPr>
+          <a:lstStyle/>
+          <a:p>
+            <a:r>
+              <a:rPr sz="1150" b="0">
+                <a:solidFill>
+                  <a:srgbClr val="C7D8DB"/>
+                </a:solidFill>
+                <a:latin typeface="Calibri"/>
+              </a:rPr>
+              <a:t>Runs can be compared point by point, in millimetres. The index can still be computed from the curve afterwards.</a:t>
+            </a:r>
+          </a:p>
+        </p:txBody>
+      </p:sp>
+      <p:sp>
+        <p:nvSpPr>
+          <p:cNvPr id="13" name="Shape 4"/>
           <p:cNvSpPr/>
           <p:nvPr/>
         </p:nvSpPr>
         <p:spPr>
           <a:xfrm>
-            <a:off x="4663440" y="1325880"/>
-            <a:ext cx="4023360" cy="2514600"/>
+            <a:off x="457200" y="2596896"/>
+            <a:ext cx="8229600" cy="640080"/>
           </a:xfrm>
           <a:prstGeom prst="roundRect">
             <a:avLst>
@@ -4375,66 +5837,35 @@
       </p:sp>
       <p:sp>
         <p:nvSpPr>
-          <p:cNvPr id="8" name="TextBox 7"/>
-          <p:cNvSpPr txBox="1"/>
-          <p:nvPr/>
-        </p:nvSpPr>
-        <p:spPr>
-          <a:xfrm>
-            <a:off x="4892040" y="1508760"/>
-            <a:ext cx="3566160" cy="228600"/>
-          </a:xfrm>
-          <a:prstGeom prst="rect">
-            <a:avLst/>
-          </a:prstGeom>
-          <a:noFill/>
-        </p:spPr>
-        <p:txBody>
-          <a:bodyPr wrap="square" lIns="0" tIns="0" rIns="0" bIns="0" anchor="t">
+          <p:cNvPr id="14" name="TextBox 13"/>
+          <p:cNvSpPr txBox="1"/>
+          <p:nvPr/>
+        </p:nvSpPr>
+        <p:spPr>
+          <a:xfrm>
+            <a:off x="731520" y="2596896"/>
+            <a:ext cx="7680960" cy="640080"/>
+          </a:xfrm>
+          <a:prstGeom prst="rect">
+            <a:avLst/>
+          </a:prstGeom>
+          <a:noFill/>
+        </p:spPr>
+        <p:txBody>
+          <a:bodyPr wrap="square" lIns="0" tIns="0" rIns="0" bIns="0" anchor="ctr">
             <a:spAutoFit/>
           </a:bodyPr>
           <a:lstStyle/>
           <a:p>
             <a:r>
-              <a:rPr sz="1100" b="1" spc="200">
+              <a:rPr sz="1200" b="1">
                 <a:solidFill>
                   <a:srgbClr val="028090"/>
                 </a:solidFill>
                 <a:latin typeface="Calibri"/>
               </a:rPr>
-              <a:t>NOT YET, AND NEXT</a:t>
-            </a:r>
-          </a:p>
-        </p:txBody>
-      </p:sp>
-      <p:sp>
-        <p:nvSpPr>
-          <p:cNvPr id="9" name="TextBox 8"/>
-          <p:cNvSpPr txBox="1"/>
-          <p:nvPr/>
-        </p:nvSpPr>
-        <p:spPr>
-          <a:xfrm>
-            <a:off x="4892040" y="1874519"/>
-            <a:ext cx="3611880" cy="1920240"/>
-          </a:xfrm>
-          <a:prstGeom prst="rect">
-            <a:avLst/>
-          </a:prstGeom>
-          <a:noFill/>
-        </p:spPr>
-        <p:txBody>
-          <a:bodyPr wrap="square" lIns="0" tIns="0" rIns="0" bIns="0" anchor="t">
-            <a:spAutoFit/>
-          </a:bodyPr>
-          <a:lstStyle/>
-          <a:p>
-            <a:pPr marL="171450" indent="-171450">
-              <a:spcAft>
-                <a:spcPts val="700"/>
-              </a:spcAft>
-              <a:buChar char="•"/>
-            </a:pPr>
+              <a:t>The idea.</a:t>
+            </a:r>
             <a:r>
               <a:rPr sz="1200" b="0">
                 <a:solidFill>
@@ -4442,55 +5873,21 @@
                 </a:solidFill>
                 <a:latin typeface="Calibri"/>
               </a:rPr>
-              <a:t>Only one real run, so change between real runs is untested</a:t>
-            </a:r>
-          </a:p>
-          <a:p>
-            <a:pPr marL="171450" indent="-171450">
-              <a:spcAft>
-                <a:spcPts val="700"/>
-              </a:spcAft>
-              <a:buChar char="•"/>
-            </a:pPr>
-            <a:r>
-              <a:rPr sz="1200" b="0">
-                <a:solidFill>
-                  <a:srgbClr val="16262B"/>
-                </a:solidFill>
-                <a:latin typeface="Calibri"/>
-              </a:rPr>
-              <a:t>Height is relative to the sensor: no cross-level, twist or surface</a:t>
-            </a:r>
-          </a:p>
-          <a:p>
-            <a:pPr marL="171450" indent="-171450">
-              <a:spcAft>
-                <a:spcPts val="700"/>
-              </a:spcAft>
-              <a:buChar char="•"/>
-            </a:pPr>
-            <a:r>
-              <a:rPr sz="1200" b="0">
-                <a:solidFill>
-                  <a:srgbClr val="16262B"/>
-                </a:solidFill>
-                <a:latin typeface="Calibri"/>
-              </a:rPr>
-              <a:t>Next: a second run, data with levelled height, and a check against the track-recording car</a:t>
-            </a:r>
-          </a:p>
-        </p:txBody>
-      </p:sp>
-      <p:sp>
-        <p:nvSpPr>
-          <p:cNvPr id="10" name="Shape 16"/>
+              <a:t>  Keep the index, but read it from a curve that still knows where and how the track changed.</a:t>
+            </a:r>
+          </a:p>
+        </p:txBody>
+      </p:sp>
+      <p:sp>
+        <p:nvSpPr>
+          <p:cNvPr id="15" name="Shape 16"/>
           <p:cNvSpPr/>
           <p:nvPr/>
         </p:nvSpPr>
         <p:spPr>
           <a:xfrm>
-            <a:off x="457200" y="4114800"/>
-            <a:ext cx="8229600" cy="530352"/>
+            <a:off x="457200" y="4224528"/>
+            <a:ext cx="8229600" cy="438912"/>
           </a:xfrm>
           <a:prstGeom prst="roundRect">
             <a:avLst>
@@ -4517,7 +5914,512 @@
       </p:sp>
       <p:sp>
         <p:nvSpPr>
-          <p:cNvPr id="11" name="Text 17"/>
+          <p:cNvPr id="16" name="Text 17"/>
+          <p:cNvSpPr txBox="1"/>
+          <p:nvPr/>
+        </p:nvSpPr>
+        <p:spPr>
+          <a:xfrm>
+            <a:off x="731520" y="4224528"/>
+            <a:ext cx="7680960" cy="438912"/>
+          </a:xfrm>
+          <a:prstGeom prst="rect">
+            <a:avLst/>
+          </a:prstGeom>
+          <a:noFill/>
+          <a:ln/>
+        </p:spPr>
+        <p:txBody>
+          <a:bodyPr wrap="square" lIns="0" tIns="0" rIns="0" bIns="0" rtlCol="0" anchor="ctr"/>
+          <a:lstStyle/>
+          <a:p>
+            <a:pPr marL="0" indent="0">
+              <a:buNone/>
+            </a:pPr>
+            <a:r>
+              <a:rPr lang="en-US" sz="1200" b="1" dirty="0">
+                <a:solidFill>
+                  <a:srgbClr val="FFFFFF"/>
+                </a:solidFill>
+                <a:latin typeface="Calibri" pitchFamily="34" charset="0"/>
+                <a:ea typeface="Calibri" pitchFamily="34" charset="-122"/>
+                <a:cs typeface="Calibri" pitchFamily="34" charset="-120"/>
+              </a:rPr>
+              <a:t>Catmull-Rom: a change in one place moves the curve only there, which is what an index cannot show.</a:t>
+            </a:r>
+            <a:endParaRPr lang="en-US" sz="1200" dirty="0"/>
+          </a:p>
+        </p:txBody>
+      </p:sp>
+      <p:sp>
+        <p:nvSpPr>
+          <p:cNvPr id="17" name="Shape 4"/>
+          <p:cNvSpPr/>
+          <p:nvPr/>
+        </p:nvSpPr>
+        <p:spPr>
+          <a:xfrm>
+            <a:off x="457200" y="3364992"/>
+            <a:ext cx="2624328" cy="731520"/>
+          </a:xfrm>
+          <a:prstGeom prst="roundRect">
+            <a:avLst>
+              <a:gd name="adj" fmla="val 9375"/>
+            </a:avLst>
+          </a:prstGeom>
+          <a:solidFill>
+            <a:srgbClr val="EDF5F5"/>
+          </a:solidFill>
+          <a:ln w="12700">
+            <a:solidFill>
+              <a:srgbClr val="EDF5F5"/>
+            </a:solidFill>
+            <a:prstDash val="solid"/>
+          </a:ln>
+        </p:spPr>
+        <p:txBody>
+          <a:bodyPr/>
+          <a:lstStyle/>
+          <a:p>
+            <a:endParaRPr lang="sv-SE"/>
+          </a:p>
+        </p:txBody>
+      </p:sp>
+      <p:sp>
+        <p:nvSpPr>
+          <p:cNvPr id="18" name="Text 6"/>
+          <p:cNvSpPr txBox="1"/>
+          <p:nvPr/>
+        </p:nvSpPr>
+        <p:spPr>
+          <a:xfrm>
+            <a:off x="658368" y="3438144"/>
+            <a:ext cx="2286000" cy="237744"/>
+          </a:xfrm>
+          <a:prstGeom prst="rect">
+            <a:avLst/>
+          </a:prstGeom>
+          <a:noFill/>
+          <a:ln/>
+        </p:spPr>
+        <p:txBody>
+          <a:bodyPr wrap="square" lIns="0" tIns="0" rIns="0" bIns="0" rtlCol="0" anchor="ctr"/>
+          <a:lstStyle/>
+          <a:p>
+            <a:pPr marL="0" indent="0">
+              <a:buNone/>
+            </a:pPr>
+            <a:r>
+              <a:rPr lang="en-US" sz="1100" b="1" dirty="0">
+                <a:solidFill>
+                  <a:srgbClr val="16262B"/>
+                </a:solidFill>
+                <a:latin typeface="Calibri" pitchFamily="34" charset="0"/>
+                <a:ea typeface="Calibri" pitchFamily="34" charset="-122"/>
+                <a:cs typeface="Calibri" pitchFamily="34" charset="-120"/>
+              </a:rPr>
+              <a:t>Gauge</a:t>
+            </a:r>
+            <a:endParaRPr lang="en-US" sz="1100" dirty="0"/>
+          </a:p>
+        </p:txBody>
+      </p:sp>
+      <p:sp>
+        <p:nvSpPr>
+          <p:cNvPr id="19" name="Text 7"/>
+          <p:cNvSpPr txBox="1"/>
+          <p:nvPr/>
+        </p:nvSpPr>
+        <p:spPr>
+          <a:xfrm>
+            <a:off x="658368" y="3685032"/>
+            <a:ext cx="2286000" cy="347472"/>
+          </a:xfrm>
+          <a:prstGeom prst="rect">
+            <a:avLst/>
+          </a:prstGeom>
+          <a:noFill/>
+          <a:ln/>
+        </p:spPr>
+        <p:txBody>
+          <a:bodyPr wrap="square" lIns="0" tIns="0" rIns="0" bIns="0" rtlCol="0" anchor="ctr"/>
+          <a:lstStyle/>
+          <a:p>
+            <a:pPr marL="0" indent="0">
+              <a:buNone/>
+            </a:pPr>
+            <a:r>
+              <a:rPr lang="en-US" sz="900" dirty="0">
+                <a:solidFill>
+                  <a:srgbClr val="5F7178"/>
+                </a:solidFill>
+                <a:latin typeface="Calibri" pitchFamily="34" charset="0"/>
+                <a:ea typeface="Calibri" pitchFamily="34" charset="-122"/>
+                <a:cs typeface="Calibri" pitchFamily="34" charset="-120"/>
+              </a:rPr>
+              <a:t>the distance between the rails: measured in full</a:t>
+            </a:r>
+            <a:endParaRPr lang="en-US" sz="900" dirty="0"/>
+          </a:p>
+        </p:txBody>
+      </p:sp>
+      <p:sp>
+        <p:nvSpPr>
+          <p:cNvPr id="20" name="Shape 4"/>
+          <p:cNvSpPr/>
+          <p:nvPr/>
+        </p:nvSpPr>
+        <p:spPr>
+          <a:xfrm>
+            <a:off x="3259836" y="3364992"/>
+            <a:ext cx="2624328" cy="731520"/>
+          </a:xfrm>
+          <a:prstGeom prst="roundRect">
+            <a:avLst>
+              <a:gd name="adj" fmla="val 9375"/>
+            </a:avLst>
+          </a:prstGeom>
+          <a:solidFill>
+            <a:srgbClr val="EDF5F5"/>
+          </a:solidFill>
+          <a:ln w="12700">
+            <a:solidFill>
+              <a:srgbClr val="EDF5F5"/>
+            </a:solidFill>
+            <a:prstDash val="solid"/>
+          </a:ln>
+        </p:spPr>
+        <p:txBody>
+          <a:bodyPr/>
+          <a:lstStyle/>
+          <a:p>
+            <a:endParaRPr lang="sv-SE"/>
+          </a:p>
+        </p:txBody>
+      </p:sp>
+      <p:sp>
+        <p:nvSpPr>
+          <p:cNvPr id="21" name="Text 6"/>
+          <p:cNvSpPr txBox="1"/>
+          <p:nvPr/>
+        </p:nvSpPr>
+        <p:spPr>
+          <a:xfrm>
+            <a:off x="3461004" y="3438144"/>
+            <a:ext cx="2286000" cy="237744"/>
+          </a:xfrm>
+          <a:prstGeom prst="rect">
+            <a:avLst/>
+          </a:prstGeom>
+          <a:noFill/>
+          <a:ln/>
+        </p:spPr>
+        <p:txBody>
+          <a:bodyPr wrap="square" lIns="0" tIns="0" rIns="0" bIns="0" rtlCol="0" anchor="ctr"/>
+          <a:lstStyle/>
+          <a:p>
+            <a:pPr marL="0" indent="0">
+              <a:buNone/>
+            </a:pPr>
+            <a:r>
+              <a:rPr lang="en-US" sz="1100" b="1" dirty="0">
+                <a:solidFill>
+                  <a:srgbClr val="16262B"/>
+                </a:solidFill>
+                <a:latin typeface="Calibri" pitchFamily="34" charset="0"/>
+                <a:ea typeface="Calibri" pitchFamily="34" charset="-122"/>
+                <a:cs typeface="Calibri" pitchFamily="34" charset="-120"/>
+              </a:rPr>
+              <a:t>Alignment</a:t>
+            </a:r>
+            <a:endParaRPr lang="en-US" sz="1100" dirty="0"/>
+          </a:p>
+        </p:txBody>
+      </p:sp>
+      <p:sp>
+        <p:nvSpPr>
+          <p:cNvPr id="22" name="Text 7"/>
+          <p:cNvSpPr txBox="1"/>
+          <p:nvPr/>
+        </p:nvSpPr>
+        <p:spPr>
+          <a:xfrm>
+            <a:off x="3461004" y="3685032"/>
+            <a:ext cx="2286000" cy="347472"/>
+          </a:xfrm>
+          <a:prstGeom prst="rect">
+            <a:avLst/>
+          </a:prstGeom>
+          <a:noFill/>
+          <a:ln/>
+        </p:spPr>
+        <p:txBody>
+          <a:bodyPr wrap="square" lIns="0" tIns="0" rIns="0" bIns="0" rtlCol="0" anchor="ctr"/>
+          <a:lstStyle/>
+          <a:p>
+            <a:pPr marL="0" indent="0">
+              <a:buNone/>
+            </a:pPr>
+            <a:r>
+              <a:rPr lang="en-US" sz="900" dirty="0">
+                <a:solidFill>
+                  <a:srgbClr val="5F7178"/>
+                </a:solidFill>
+                <a:latin typeface="Calibri" pitchFamily="34" charset="0"/>
+                <a:ea typeface="Calibri" pitchFamily="34" charset="-122"/>
+                <a:cs typeface="Calibri" pitchFamily="34" charset="-120"/>
+              </a:rPr>
+              <a:t>the sideways position of the track: measured in full</a:t>
+            </a:r>
+            <a:endParaRPr lang="en-US" sz="900" dirty="0"/>
+          </a:p>
+        </p:txBody>
+      </p:sp>
+      <p:sp>
+        <p:nvSpPr>
+          <p:cNvPr id="23" name="Shape 4"/>
+          <p:cNvSpPr/>
+          <p:nvPr/>
+        </p:nvSpPr>
+        <p:spPr>
+          <a:xfrm>
+            <a:off x="6062472" y="3364992"/>
+            <a:ext cx="2624328" cy="731520"/>
+          </a:xfrm>
+          <a:prstGeom prst="roundRect">
+            <a:avLst>
+              <a:gd name="adj" fmla="val 9375"/>
+            </a:avLst>
+          </a:prstGeom>
+          <a:solidFill>
+            <a:srgbClr val="EDF5F5"/>
+          </a:solidFill>
+          <a:ln w="12700">
+            <a:solidFill>
+              <a:srgbClr val="EDF5F5"/>
+            </a:solidFill>
+            <a:prstDash val="solid"/>
+          </a:ln>
+        </p:spPr>
+        <p:txBody>
+          <a:bodyPr/>
+          <a:lstStyle/>
+          <a:p>
+            <a:endParaRPr lang="sv-SE"/>
+          </a:p>
+        </p:txBody>
+      </p:sp>
+      <p:sp>
+        <p:nvSpPr>
+          <p:cNvPr id="24" name="Text 6"/>
+          <p:cNvSpPr txBox="1"/>
+          <p:nvPr/>
+        </p:nvSpPr>
+        <p:spPr>
+          <a:xfrm>
+            <a:off x="6263640" y="3438144"/>
+            <a:ext cx="2286000" cy="237744"/>
+          </a:xfrm>
+          <a:prstGeom prst="rect">
+            <a:avLst/>
+          </a:prstGeom>
+          <a:noFill/>
+          <a:ln/>
+        </p:spPr>
+        <p:txBody>
+          <a:bodyPr wrap="square" lIns="0" tIns="0" rIns="0" bIns="0" rtlCol="0" anchor="ctr"/>
+          <a:lstStyle/>
+          <a:p>
+            <a:pPr marL="0" indent="0">
+              <a:buNone/>
+            </a:pPr>
+            <a:r>
+              <a:rPr lang="en-US" sz="1100" b="1" dirty="0">
+                <a:solidFill>
+                  <a:srgbClr val="16262B"/>
+                </a:solidFill>
+                <a:latin typeface="Calibri" pitchFamily="34" charset="0"/>
+                <a:ea typeface="Calibri" pitchFamily="34" charset="-122"/>
+                <a:cs typeface="Calibri" pitchFamily="34" charset="-120"/>
+              </a:rPr>
+              <a:t>Height</a:t>
+            </a:r>
+            <a:endParaRPr lang="en-US" sz="1100" dirty="0"/>
+          </a:p>
+        </p:txBody>
+      </p:sp>
+      <p:sp>
+        <p:nvSpPr>
+          <p:cNvPr id="25" name="Text 7"/>
+          <p:cNvSpPr txBox="1"/>
+          <p:nvPr/>
+        </p:nvSpPr>
+        <p:spPr>
+          <a:xfrm>
+            <a:off x="6263640" y="3685032"/>
+            <a:ext cx="2286000" cy="347472"/>
+          </a:xfrm>
+          <a:prstGeom prst="rect">
+            <a:avLst/>
+          </a:prstGeom>
+          <a:noFill/>
+          <a:ln/>
+        </p:spPr>
+        <p:txBody>
+          <a:bodyPr wrap="square" lIns="0" tIns="0" rIns="0" bIns="0" rtlCol="0" anchor="ctr"/>
+          <a:lstStyle/>
+          <a:p>
+            <a:pPr marL="0" indent="0">
+              <a:buNone/>
+            </a:pPr>
+            <a:r>
+              <a:rPr lang="en-US" sz="900" dirty="0">
+                <a:solidFill>
+                  <a:srgbClr val="5F7178"/>
+                </a:solidFill>
+                <a:latin typeface="Calibri" pitchFamily="34" charset="0"/>
+                <a:ea typeface="Calibri" pitchFamily="34" charset="-122"/>
+                <a:cs typeface="Calibri" pitchFamily="34" charset="-120"/>
+              </a:rPr>
+              <a:t>only short dips and humps, because the sensor rides on the rails</a:t>
+            </a:r>
+            <a:endParaRPr lang="en-US" sz="900" dirty="0"/>
+          </a:p>
+        </p:txBody>
+      </p:sp>
+    </p:spTree>
+  </p:cSld>
+  <p:clrMapOvr>
+    <a:masterClrMapping/>
+  </p:clrMapOvr>
+</p:sld>
+</file>
+
+<file path=ppt/slides/slide8.xml><?xml version="1.0" encoding="utf-8"?>
+<p:sld xmlns:a="http://schemas.openxmlformats.org/drawingml/2006/main" xmlns:p="http://schemas.openxmlformats.org/presentationml/2006/main" xmlns:r="http://schemas.openxmlformats.org/officeDocument/2006/relationships">
+  <p:cSld>
+    <p:spTree>
+      <p:nvGrpSpPr>
+        <p:cNvPr id="1" name=""/>
+        <p:cNvGrpSpPr/>
+        <p:nvPr/>
+      </p:nvGrpSpPr>
+      <p:grpSpPr/>
+      <p:sp>
+        <p:nvSpPr>
+          <p:cNvPr id="2" name="Text 0"/>
+          <p:cNvSpPr txBox="1"/>
+          <p:nvPr/>
+        </p:nvSpPr>
+        <p:spPr>
+          <a:xfrm>
+            <a:off x="457200" y="274320"/>
+            <a:ext cx="8229600" cy="228600"/>
+          </a:xfrm>
+          <a:prstGeom prst="rect">
+            <a:avLst/>
+          </a:prstGeom>
+          <a:noFill/>
+          <a:ln/>
+        </p:spPr>
+        <p:txBody>
+          <a:bodyPr wrap="square" lIns="0" tIns="0" rIns="0" bIns="0" rtlCol="0" anchor="ctr"/>
+          <a:lstStyle/>
+          <a:p>
+            <a:pPr marL="0" indent="0">
+              <a:buNone/>
+            </a:pPr>
+            <a:r>
+              <a:rPr lang="en-US" sz="1100" b="1" kern="0" spc="200" dirty="0">
+                <a:solidFill>
+                  <a:srgbClr val="028090"/>
+                </a:solidFill>
+                <a:latin typeface="Calibri" pitchFamily="34" charset="0"/>
+                <a:ea typeface="Calibri" pitchFamily="34" charset="-122"/>
+                <a:cs typeface="Calibri" pitchFamily="34" charset="-120"/>
+              </a:rPr>
+              <a:t>RESEARCH QUESTIONS</a:t>
+            </a:r>
+            <a:endParaRPr lang="en-US" sz="1100" dirty="0"/>
+          </a:p>
+        </p:txBody>
+      </p:sp>
+      <p:sp>
+        <p:nvSpPr>
+          <p:cNvPr id="3" name="Text 1"/>
+          <p:cNvSpPr txBox="1"/>
+          <p:nvPr/>
+        </p:nvSpPr>
+        <p:spPr>
+          <a:xfrm>
+            <a:off x="457200" y="502920"/>
+            <a:ext cx="8229600" cy="548640"/>
+          </a:xfrm>
+          <a:prstGeom prst="rect">
+            <a:avLst/>
+          </a:prstGeom>
+          <a:noFill/>
+          <a:ln/>
+        </p:spPr>
+        <p:txBody>
+          <a:bodyPr wrap="square" lIns="0" tIns="0" rIns="0" bIns="0" rtlCol="0" anchor="ctr"/>
+          <a:lstStyle/>
+          <a:p>
+            <a:pPr marL="0" indent="0">
+              <a:buNone/>
+            </a:pPr>
+            <a:r>
+              <a:rPr lang="en-US" sz="2700" b="1" dirty="0">
+                <a:solidFill>
+                  <a:srgbClr val="16262B"/>
+                </a:solidFill>
+                <a:latin typeface="Cambria" pitchFamily="34" charset="0"/>
+                <a:ea typeface="Cambria" pitchFamily="34" charset="-122"/>
+                <a:cs typeface="Cambria" pitchFamily="34" charset="-120"/>
+              </a:rPr>
+              <a:t>What the report answers</a:t>
+            </a:r>
+            <a:endParaRPr lang="en-US" sz="2700" dirty="0"/>
+          </a:p>
+        </p:txBody>
+      </p:sp>
+      <p:sp>
+        <p:nvSpPr>
+          <p:cNvPr id="4" name="Shape 16"/>
+          <p:cNvSpPr/>
+          <p:nvPr/>
+        </p:nvSpPr>
+        <p:spPr>
+          <a:xfrm>
+            <a:off x="457200" y="4114800"/>
+            <a:ext cx="8229600" cy="530352"/>
+          </a:xfrm>
+          <a:prstGeom prst="roundRect">
+            <a:avLst>
+              <a:gd name="adj" fmla="val 9091"/>
+            </a:avLst>
+          </a:prstGeom>
+          <a:solidFill>
+            <a:srgbClr val="0B2027"/>
+          </a:solidFill>
+          <a:ln w="12700">
+            <a:solidFill>
+              <a:srgbClr val="0B2027"/>
+            </a:solidFill>
+            <a:prstDash val="solid"/>
+          </a:ln>
+        </p:spPr>
+        <p:txBody>
+          <a:bodyPr/>
+          <a:lstStyle/>
+          <a:p>
+            <a:endParaRPr lang="sv-SE"/>
+          </a:p>
+        </p:txBody>
+      </p:sp>
+      <p:sp>
+        <p:nvSpPr>
+          <p:cNvPr id="5" name="Text 17"/>
           <p:cNvSpPr txBox="1"/>
           <p:nvPr/>
         </p:nvSpPr>
@@ -4548,9 +6450,456 @@
                 <a:ea typeface="Calibri" pitchFamily="34" charset="-122"/>
                 <a:cs typeface="Calibri" pitchFamily="34" charset="-120"/>
               </a:rPr>
-              <a:t>The method is ready: the first real comparison can be made the day a second run exists.</a:t>
+              <a:t>Exploratory: one scan, so the answers describe the method, not the track.</a:t>
             </a:r>
             <a:endParaRPr lang="en-US" sz="1200" dirty="0"/>
+          </a:p>
+        </p:txBody>
+      </p:sp>
+      <p:sp>
+        <p:nvSpPr>
+          <p:cNvPr id="6" name="Shape 2"/>
+          <p:cNvSpPr/>
+          <p:nvPr/>
+        </p:nvSpPr>
+        <p:spPr>
+          <a:xfrm>
+            <a:off x="457200" y="1371600"/>
+            <a:ext cx="384048" cy="384048"/>
+          </a:xfrm>
+          <a:prstGeom prst="ellipse">
+            <a:avLst/>
+          </a:prstGeom>
+          <a:solidFill>
+            <a:srgbClr val="0F8B8D"/>
+          </a:solidFill>
+          <a:ln w="12700">
+            <a:solidFill>
+              <a:srgbClr val="028090"/>
+            </a:solidFill>
+            <a:prstDash val="solid"/>
+          </a:ln>
+        </p:spPr>
+        <p:txBody>
+          <a:bodyPr/>
+          <a:lstStyle/>
+          <a:p>
+            <a:endParaRPr lang="sv-SE"/>
+          </a:p>
+        </p:txBody>
+      </p:sp>
+      <p:sp>
+        <p:nvSpPr>
+          <p:cNvPr id="7" name="Text 3"/>
+          <p:cNvSpPr txBox="1"/>
+          <p:nvPr/>
+        </p:nvSpPr>
+        <p:spPr>
+          <a:xfrm>
+            <a:off x="457200" y="1371600"/>
+            <a:ext cx="384048" cy="384048"/>
+          </a:xfrm>
+          <a:prstGeom prst="rect">
+            <a:avLst/>
+          </a:prstGeom>
+          <a:noFill/>
+          <a:ln/>
+        </p:spPr>
+        <p:txBody>
+          <a:bodyPr wrap="square" lIns="0" tIns="0" rIns="0" bIns="0" rtlCol="0" anchor="ctr"/>
+          <a:lstStyle/>
+          <a:p>
+            <a:pPr marL="0" indent="0" algn="ctr">
+              <a:buNone/>
+            </a:pPr>
+            <a:r>
+              <a:rPr lang="en-US" sz="1400" b="1" dirty="0">
+                <a:solidFill>
+                  <a:srgbClr val="FFFFFF"/>
+                </a:solidFill>
+                <a:latin typeface="Calibri" pitchFamily="34" charset="0"/>
+                <a:ea typeface="Calibri" pitchFamily="34" charset="-122"/>
+                <a:cs typeface="Calibri" pitchFamily="34" charset="-120"/>
+              </a:rPr>
+              <a:t>1</a:t>
+            </a:r>
+            <a:endParaRPr lang="en-US" sz="1400" dirty="0"/>
+          </a:p>
+        </p:txBody>
+      </p:sp>
+      <p:sp>
+        <p:nvSpPr>
+          <p:cNvPr id="8" name="Text 4"/>
+          <p:cNvSpPr txBox="1"/>
+          <p:nvPr/>
+        </p:nvSpPr>
+        <p:spPr>
+          <a:xfrm>
+            <a:off x="1005840" y="1389888"/>
+            <a:ext cx="2743200" cy="274320"/>
+          </a:xfrm>
+          <a:prstGeom prst="rect">
+            <a:avLst/>
+          </a:prstGeom>
+          <a:noFill/>
+          <a:ln/>
+        </p:spPr>
+        <p:txBody>
+          <a:bodyPr wrap="square" lIns="0" tIns="0" rIns="0" bIns="0" rtlCol="0" anchor="ctr"/>
+          <a:lstStyle/>
+          <a:p>
+            <a:pPr marL="0" indent="0">
+              <a:buNone/>
+            </a:pPr>
+            <a:r>
+              <a:rPr lang="en-US" sz="1400" b="1" dirty="0">
+                <a:solidFill>
+                  <a:srgbClr val="16262B"/>
+                </a:solidFill>
+                <a:latin typeface="Calibri" pitchFamily="34" charset="0"/>
+                <a:ea typeface="Calibri" pitchFamily="34" charset="-122"/>
+                <a:cs typeface="Calibri" pitchFamily="34" charset="-120"/>
+              </a:rPr>
+              <a:t>Split the scan in two: how much do the two curves differ?</a:t>
+            </a:r>
+            <a:endParaRPr lang="en-US" sz="1400" dirty="0"/>
+          </a:p>
+        </p:txBody>
+      </p:sp>
+      <p:sp>
+        <p:nvSpPr>
+          <p:cNvPr id="9" name="Text 5"/>
+          <p:cNvSpPr txBox="1"/>
+          <p:nvPr/>
+        </p:nvSpPr>
+        <p:spPr>
+          <a:xfrm>
+            <a:off x="3886200" y="1353312"/>
+            <a:ext cx="4800600" cy="420624"/>
+          </a:xfrm>
+          <a:prstGeom prst="rect">
+            <a:avLst/>
+          </a:prstGeom>
+          <a:noFill/>
+          <a:ln/>
+        </p:spPr>
+        <p:txBody>
+          <a:bodyPr wrap="square" lIns="0" tIns="0" rIns="0" bIns="0" rtlCol="0" anchor="ctr"/>
+          <a:lstStyle/>
+          <a:p>
+            <a:pPr marL="0" indent="0">
+              <a:buNone/>
+            </a:pPr>
+            <a:r>
+              <a:rPr lang="en-US" sz="1100" dirty="0">
+                <a:solidFill>
+                  <a:srgbClr val="5F7178"/>
+                </a:solidFill>
+                <a:latin typeface="Calibri" pitchFamily="34" charset="0"/>
+                <a:ea typeface="Calibri" pitchFamily="34" charset="-122"/>
+                <a:cs typeface="Calibri" pitchFamily="34" charset="-120"/>
+              </a:rPr>
+              <a:t>for gauge, alignment and height</a:t>
+            </a:r>
+            <a:endParaRPr lang="en-US" sz="1100" dirty="0"/>
+          </a:p>
+        </p:txBody>
+      </p:sp>
+      <p:sp>
+        <p:nvSpPr>
+          <p:cNvPr id="10" name="Shape 2"/>
+          <p:cNvSpPr/>
+          <p:nvPr/>
+        </p:nvSpPr>
+        <p:spPr>
+          <a:xfrm>
+            <a:off x="457200" y="2029967"/>
+            <a:ext cx="384048" cy="384048"/>
+          </a:xfrm>
+          <a:prstGeom prst="ellipse">
+            <a:avLst/>
+          </a:prstGeom>
+          <a:solidFill>
+            <a:srgbClr val="0F8B8D"/>
+          </a:solidFill>
+          <a:ln w="12700">
+            <a:solidFill>
+              <a:srgbClr val="028090"/>
+            </a:solidFill>
+            <a:prstDash val="solid"/>
+          </a:ln>
+        </p:spPr>
+        <p:txBody>
+          <a:bodyPr/>
+          <a:lstStyle/>
+          <a:p>
+            <a:endParaRPr lang="sv-SE"/>
+          </a:p>
+        </p:txBody>
+      </p:sp>
+      <p:sp>
+        <p:nvSpPr>
+          <p:cNvPr id="11" name="Text 3"/>
+          <p:cNvSpPr txBox="1"/>
+          <p:nvPr/>
+        </p:nvSpPr>
+        <p:spPr>
+          <a:xfrm>
+            <a:off x="457200" y="2029967"/>
+            <a:ext cx="384048" cy="384048"/>
+          </a:xfrm>
+          <a:prstGeom prst="rect">
+            <a:avLst/>
+          </a:prstGeom>
+          <a:noFill/>
+          <a:ln/>
+        </p:spPr>
+        <p:txBody>
+          <a:bodyPr wrap="square" lIns="0" tIns="0" rIns="0" bIns="0" rtlCol="0" anchor="ctr"/>
+          <a:lstStyle/>
+          <a:p>
+            <a:pPr marL="0" indent="0" algn="ctr">
+              <a:buNone/>
+            </a:pPr>
+            <a:r>
+              <a:rPr lang="en-US" sz="1400" b="1" dirty="0">
+                <a:solidFill>
+                  <a:srgbClr val="FFFFFF"/>
+                </a:solidFill>
+                <a:latin typeface="Calibri" pitchFamily="34" charset="0"/>
+                <a:ea typeface="Calibri" pitchFamily="34" charset="-122"/>
+                <a:cs typeface="Calibri" pitchFamily="34" charset="-120"/>
+              </a:rPr>
+              <a:t>2</a:t>
+            </a:r>
+            <a:endParaRPr lang="en-US" sz="1400" dirty="0"/>
+          </a:p>
+        </p:txBody>
+      </p:sp>
+      <p:sp>
+        <p:nvSpPr>
+          <p:cNvPr id="12" name="Text 4"/>
+          <p:cNvSpPr txBox="1"/>
+          <p:nvPr/>
+        </p:nvSpPr>
+        <p:spPr>
+          <a:xfrm>
+            <a:off x="1005840" y="2048255"/>
+            <a:ext cx="2743200" cy="274320"/>
+          </a:xfrm>
+          <a:prstGeom prst="rect">
+            <a:avLst/>
+          </a:prstGeom>
+          <a:noFill/>
+          <a:ln/>
+        </p:spPr>
+        <p:txBody>
+          <a:bodyPr wrap="square" lIns="0" tIns="0" rIns="0" bIns="0" rtlCol="0" anchor="ctr"/>
+          <a:lstStyle/>
+          <a:p>
+            <a:pPr marL="0" indent="0">
+              <a:buNone/>
+            </a:pPr>
+            <a:r>
+              <a:rPr lang="en-US" sz="1400" b="1" dirty="0">
+                <a:solidFill>
+                  <a:srgbClr val="16262B"/>
+                </a:solidFill>
+                <a:latin typeface="Calibri" pitchFamily="34" charset="0"/>
+                <a:ea typeface="Calibri" pitchFamily="34" charset="-122"/>
+                <a:cs typeface="Calibri" pitchFamily="34" charset="-120"/>
+              </a:rPr>
+              <a:t>Which faults can it detect?</a:t>
+            </a:r>
+            <a:endParaRPr lang="en-US" sz="1400" dirty="0"/>
+          </a:p>
+        </p:txBody>
+      </p:sp>
+      <p:sp>
+        <p:nvSpPr>
+          <p:cNvPr id="13" name="Text 5"/>
+          <p:cNvSpPr txBox="1"/>
+          <p:nvPr/>
+        </p:nvSpPr>
+        <p:spPr>
+          <a:xfrm>
+            <a:off x="3886200" y="2011679"/>
+            <a:ext cx="4800600" cy="420624"/>
+          </a:xfrm>
+          <a:prstGeom prst="rect">
+            <a:avLst/>
+          </a:prstGeom>
+          <a:noFill/>
+          <a:ln/>
+        </p:spPr>
+        <p:txBody>
+          <a:bodyPr wrap="square" lIns="0" tIns="0" rIns="0" bIns="0" rtlCol="0" anchor="ctr"/>
+          <a:lstStyle/>
+          <a:p>
+            <a:pPr marL="0" indent="0">
+              <a:buNone/>
+            </a:pPr>
+            <a:r>
+              <a:rPr lang="en-US" sz="1100" dirty="0">
+                <a:solidFill>
+                  <a:srgbClr val="5F7178"/>
+                </a:solidFill>
+                <a:latin typeface="Calibri" pitchFamily="34" charset="0"/>
+                <a:ea typeface="Calibri" pitchFamily="34" charset="-122"/>
+                <a:cs typeface="Calibri" pitchFamily="34" charset="-120"/>
+              </a:rPr>
+              <a:t>and how does the distance between the control points affect what can be detected?</a:t>
+            </a:r>
+            <a:endParaRPr lang="en-US" sz="1100" dirty="0"/>
+          </a:p>
+        </p:txBody>
+      </p:sp>
+      <p:sp>
+        <p:nvSpPr>
+          <p:cNvPr id="14" name="Shape 2"/>
+          <p:cNvSpPr/>
+          <p:nvPr/>
+        </p:nvSpPr>
+        <p:spPr>
+          <a:xfrm>
+            <a:off x="457200" y="2688336"/>
+            <a:ext cx="384048" cy="384048"/>
+          </a:xfrm>
+          <a:prstGeom prst="ellipse">
+            <a:avLst/>
+          </a:prstGeom>
+          <a:solidFill>
+            <a:srgbClr val="0F8B8D"/>
+          </a:solidFill>
+          <a:ln w="12700">
+            <a:solidFill>
+              <a:srgbClr val="028090"/>
+            </a:solidFill>
+            <a:prstDash val="solid"/>
+          </a:ln>
+        </p:spPr>
+        <p:txBody>
+          <a:bodyPr/>
+          <a:lstStyle/>
+          <a:p>
+            <a:endParaRPr lang="sv-SE"/>
+          </a:p>
+        </p:txBody>
+      </p:sp>
+      <p:sp>
+        <p:nvSpPr>
+          <p:cNvPr id="15" name="Text 3"/>
+          <p:cNvSpPr txBox="1"/>
+          <p:nvPr/>
+        </p:nvSpPr>
+        <p:spPr>
+          <a:xfrm>
+            <a:off x="457200" y="2688336"/>
+            <a:ext cx="384048" cy="384048"/>
+          </a:xfrm>
+          <a:prstGeom prst="rect">
+            <a:avLst/>
+          </a:prstGeom>
+          <a:noFill/>
+          <a:ln/>
+        </p:spPr>
+        <p:txBody>
+          <a:bodyPr wrap="square" lIns="0" tIns="0" rIns="0" bIns="0" rtlCol="0" anchor="ctr"/>
+          <a:lstStyle/>
+          <a:p>
+            <a:pPr marL="0" indent="0" algn="ctr">
+              <a:buNone/>
+            </a:pPr>
+            <a:r>
+              <a:rPr lang="en-US" sz="1400" b="1" dirty="0">
+                <a:solidFill>
+                  <a:srgbClr val="FFFFFF"/>
+                </a:solidFill>
+                <a:latin typeface="Calibri" pitchFamily="34" charset="0"/>
+                <a:ea typeface="Calibri" pitchFamily="34" charset="-122"/>
+                <a:cs typeface="Calibri" pitchFamily="34" charset="-120"/>
+              </a:rPr>
+              <a:t>3</a:t>
+            </a:r>
+            <a:endParaRPr lang="en-US" sz="1400" dirty="0"/>
+          </a:p>
+        </p:txBody>
+      </p:sp>
+      <p:sp>
+        <p:nvSpPr>
+          <p:cNvPr id="16" name="Text 4"/>
+          <p:cNvSpPr txBox="1"/>
+          <p:nvPr/>
+        </p:nvSpPr>
+        <p:spPr>
+          <a:xfrm>
+            <a:off x="1005840" y="2706624"/>
+            <a:ext cx="2743200" cy="274320"/>
+          </a:xfrm>
+          <a:prstGeom prst="rect">
+            <a:avLst/>
+          </a:prstGeom>
+          <a:noFill/>
+          <a:ln/>
+        </p:spPr>
+        <p:txBody>
+          <a:bodyPr wrap="square" lIns="0" tIns="0" rIns="0" bIns="0" rtlCol="0" anchor="ctr"/>
+          <a:lstStyle/>
+          <a:p>
+            <a:pPr marL="0" indent="0">
+              <a:buNone/>
+            </a:pPr>
+            <a:r>
+              <a:rPr lang="en-US" sz="1400" b="1" dirty="0">
+                <a:solidFill>
+                  <a:srgbClr val="16262B"/>
+                </a:solidFill>
+                <a:latin typeface="Calibri" pitchFamily="34" charset="0"/>
+                <a:ea typeface="Calibri" pitchFamily="34" charset="-122"/>
+                <a:cs typeface="Calibri" pitchFamily="34" charset="-120"/>
+              </a:rPr>
+              <a:t>How is it used over time?</a:t>
+            </a:r>
+            <a:endParaRPr lang="en-US" sz="1400" dirty="0"/>
+          </a:p>
+        </p:txBody>
+      </p:sp>
+      <p:sp>
+        <p:nvSpPr>
+          <p:cNvPr id="17" name="Text 5"/>
+          <p:cNvSpPr txBox="1"/>
+          <p:nvPr/>
+        </p:nvSpPr>
+        <p:spPr>
+          <a:xfrm>
+            <a:off x="3886200" y="2670048"/>
+            <a:ext cx="4800600" cy="420624"/>
+          </a:xfrm>
+          <a:prstGeom prst="rect">
+            <a:avLst/>
+          </a:prstGeom>
+          <a:noFill/>
+          <a:ln/>
+        </p:spPr>
+        <p:txBody>
+          <a:bodyPr wrap="square" lIns="0" tIns="0" rIns="0" bIns="0" rtlCol="0" anchor="ctr"/>
+          <a:lstStyle/>
+          <a:p>
+            <a:pPr marL="0" indent="0">
+              <a:buNone/>
+            </a:pPr>
+            <a:r>
+              <a:rPr lang="en-US" sz="1100" dirty="0">
+                <a:solidFill>
+                  <a:srgbClr val="5F7178"/>
+                </a:solidFill>
+                <a:latin typeface="Calibri" pitchFamily="34" charset="0"/>
+                <a:ea typeface="Calibri" pitchFamily="34" charset="-122"/>
+                <a:cs typeface="Calibri" pitchFamily="34" charset="-120"/>
+              </a:rPr>
+              <a:t>how would the curve raise alerts and alarms, shown by the simulation?</a:t>
+            </a:r>
+            <a:endParaRPr lang="en-US" sz="1100" dirty="0"/>
           </a:p>
         </p:txBody>
       </p:sp>
